--- a/docs/帮扶管理信息系统介绍.pptx
+++ b/docs/帮扶管理信息系统介绍.pptx
@@ -4612,6 +4612,10 @@
           </a:solidFill>
           <a:ln/>
         </p:spPr>
+        <p:txBody>
+          <a:bodyPr/>
+          <a:p/>
+        </p:txBody>
       </p:sp>
       <p:sp>
         <p:nvSpPr>
@@ -4632,6 +4636,10 @@
           </a:solidFill>
           <a:ln/>
         </p:spPr>
+        <p:txBody>
+          <a:bodyPr/>
+          <a:p/>
+        </p:txBody>
       </p:sp>
       <p:sp>
         <p:nvSpPr>
@@ -4652,6 +4660,10 @@
           </a:solidFill>
           <a:ln/>
         </p:spPr>
+        <p:txBody>
+          <a:bodyPr/>
+          <a:p/>
+        </p:txBody>
       </p:sp>
       <p:sp>
         <p:nvSpPr>
@@ -4922,6 +4934,10 @@
           </a:solidFill>
           <a:ln/>
         </p:spPr>
+        <p:txBody>
+          <a:bodyPr/>
+          <a:p/>
+        </p:txBody>
       </p:sp>
       <p:sp>
         <p:nvSpPr>
@@ -5073,7 +5089,7 @@
                 <a:ea typeface="微软雅黑" pitchFamily="34" charset="-122"/>
                 <a:cs typeface="微软雅黑" pitchFamily="34" charset="-120"/>
               </a:rPr>
-              <a:t>帮扶管理信息系统 v1.11.2</a:t>
+              <a:t>帮扶管理信息系统 v1.11.6</a:t>
             </a:r>
             <a:endParaRPr lang="en-US" sz="1050" dirty="0"/>
           </a:p>
@@ -5107,6 +5123,10 @@
             </a:outerShdw>
           </a:effectLst>
         </p:spPr>
+        <p:txBody>
+          <a:bodyPr/>
+          <a:p/>
+        </p:txBody>
       </p:sp>
       <p:sp>
         <p:nvSpPr>
@@ -5302,6 +5322,10 @@
             </a:outerShdw>
           </a:effectLst>
         </p:spPr>
+        <p:txBody>
+          <a:bodyPr/>
+          <a:p/>
+        </p:txBody>
       </p:sp>
       <p:sp>
         <p:nvSpPr>
@@ -5520,6 +5544,10 @@
           </a:solidFill>
           <a:ln/>
         </p:spPr>
+        <p:txBody>
+          <a:bodyPr/>
+          <a:p/>
+        </p:txBody>
       </p:sp>
       <p:sp>
         <p:nvSpPr>
@@ -5671,7 +5699,7 @@
                 <a:ea typeface="微软雅黑" pitchFamily="34" charset="-122"/>
                 <a:cs typeface="微软雅黑" pitchFamily="34" charset="-120"/>
               </a:rPr>
-              <a:t>帮扶管理信息系统 v1.11.2</a:t>
+              <a:t>帮扶管理信息系统 v1.11.6</a:t>
             </a:r>
             <a:endParaRPr lang="en-US" sz="1050" dirty="0"/>
           </a:p>
@@ -5696,6 +5724,10 @@
           </a:solidFill>
           <a:ln/>
         </p:spPr>
+        <p:txBody>
+          <a:bodyPr/>
+          <a:p/>
+        </p:txBody>
       </p:sp>
       <p:sp>
         <p:nvSpPr>
@@ -5794,6 +5826,10 @@
           </a:solidFill>
           <a:ln/>
         </p:spPr>
+        <p:txBody>
+          <a:bodyPr/>
+          <a:p/>
+        </p:txBody>
       </p:sp>
       <p:sp>
         <p:nvSpPr>
@@ -5892,6 +5928,10 @@
           </a:solidFill>
           <a:ln/>
         </p:spPr>
+        <p:txBody>
+          <a:bodyPr/>
+          <a:p/>
+        </p:txBody>
       </p:sp>
       <p:sp>
         <p:nvSpPr>
@@ -5990,6 +6030,10 @@
           </a:solidFill>
           <a:ln/>
         </p:spPr>
+        <p:txBody>
+          <a:bodyPr/>
+          <a:p/>
+        </p:txBody>
       </p:sp>
       <p:sp>
         <p:nvSpPr>
@@ -6088,6 +6132,10 @@
           </a:solidFill>
           <a:ln/>
         </p:spPr>
+        <p:txBody>
+          <a:bodyPr/>
+          <a:p/>
+        </p:txBody>
       </p:sp>
       <p:sp>
         <p:nvSpPr>
@@ -6195,6 +6243,10 @@
             </a:outerShdw>
           </a:effectLst>
         </p:spPr>
+        <p:txBody>
+          <a:bodyPr/>
+          <a:p/>
+        </p:txBody>
       </p:sp>
       <p:sp>
         <p:nvSpPr>
@@ -6392,6 +6444,10 @@
           </a:solidFill>
           <a:ln/>
         </p:spPr>
+        <p:txBody>
+          <a:bodyPr/>
+          <a:p/>
+        </p:txBody>
       </p:sp>
       <p:sp>
         <p:nvSpPr>
@@ -6543,7 +6599,7 @@
                 <a:ea typeface="微软雅黑" pitchFamily="34" charset="-122"/>
                 <a:cs typeface="微软雅黑" pitchFamily="34" charset="-120"/>
               </a:rPr>
-              <a:t>帮扶管理信息系统 v1.11.2</a:t>
+              <a:t>帮扶管理信息系统 v1.11.6</a:t>
             </a:r>
             <a:endParaRPr lang="en-US" sz="1050" dirty="0"/>
           </a:p>
@@ -6577,6 +6633,10 @@
             </a:outerShdw>
           </a:effectLst>
         </p:spPr>
+        <p:txBody>
+          <a:bodyPr/>
+          <a:p/>
+        </p:txBody>
       </p:sp>
       <p:sp>
         <p:nvSpPr>
@@ -6772,6 +6832,10 @@
             </a:outerShdw>
           </a:effectLst>
         </p:spPr>
+        <p:txBody>
+          <a:bodyPr/>
+          <a:p/>
+        </p:txBody>
       </p:sp>
       <p:sp>
         <p:nvSpPr>
@@ -6990,6 +7054,10 @@
           </a:solidFill>
           <a:ln/>
         </p:spPr>
+        <p:txBody>
+          <a:bodyPr/>
+          <a:p/>
+        </p:txBody>
       </p:sp>
       <p:sp>
         <p:nvSpPr>
@@ -7141,7 +7209,7 @@
                 <a:ea typeface="微软雅黑" pitchFamily="34" charset="-122"/>
                 <a:cs typeface="微软雅黑" pitchFamily="34" charset="-120"/>
               </a:rPr>
-              <a:t>帮扶管理信息系统 v1.11.2</a:t>
+              <a:t>帮扶管理信息系统 v1.11.6</a:t>
             </a:r>
             <a:endParaRPr lang="en-US" sz="1050" dirty="0"/>
           </a:p>
@@ -7175,6 +7243,10 @@
             </a:outerShdw>
           </a:effectLst>
         </p:spPr>
+        <p:txBody>
+          <a:bodyPr/>
+          <a:p/>
+        </p:txBody>
       </p:sp>
       <p:sp>
         <p:nvSpPr>
@@ -7328,6 +7400,10 @@
             </a:outerShdw>
           </a:effectLst>
         </p:spPr>
+        <p:txBody>
+          <a:bodyPr/>
+          <a:p/>
+        </p:txBody>
       </p:sp>
       <p:sp>
         <p:nvSpPr>
@@ -7474,6 +7550,10 @@
           </a:solidFill>
           <a:ln/>
         </p:spPr>
+        <p:txBody>
+          <a:bodyPr/>
+          <a:p/>
+        </p:txBody>
       </p:sp>
       <p:sp>
         <p:nvSpPr>
@@ -7537,6 +7617,10 @@
             <a:tailEnd type="triangle"/>
           </a:ln>
         </p:spPr>
+        <p:txBody>
+          <a:bodyPr/>
+          <a:p/>
+        </p:txBody>
       </p:sp>
       <p:sp>
         <p:nvSpPr>
@@ -7559,6 +7643,10 @@
           </a:solidFill>
           <a:ln/>
         </p:spPr>
+        <p:txBody>
+          <a:bodyPr/>
+          <a:p/>
+        </p:txBody>
       </p:sp>
       <p:sp>
         <p:nvSpPr>
@@ -7622,6 +7710,10 @@
             <a:tailEnd type="triangle"/>
           </a:ln>
         </p:spPr>
+        <p:txBody>
+          <a:bodyPr/>
+          <a:p/>
+        </p:txBody>
       </p:sp>
       <p:sp>
         <p:nvSpPr>
@@ -7644,6 +7736,10 @@
           </a:solidFill>
           <a:ln/>
         </p:spPr>
+        <p:txBody>
+          <a:bodyPr/>
+          <a:p/>
+        </p:txBody>
       </p:sp>
       <p:sp>
         <p:nvSpPr>
@@ -7707,6 +7803,10 @@
             <a:tailEnd type="triangle"/>
           </a:ln>
         </p:spPr>
+        <p:txBody>
+          <a:bodyPr/>
+          <a:p/>
+        </p:txBody>
       </p:sp>
       <p:sp>
         <p:nvSpPr>
@@ -7729,6 +7829,10 @@
           </a:solidFill>
           <a:ln/>
         </p:spPr>
+        <p:txBody>
+          <a:bodyPr/>
+          <a:p/>
+        </p:txBody>
       </p:sp>
       <p:sp>
         <p:nvSpPr>
@@ -7792,6 +7896,10 @@
             <a:tailEnd type="triangle"/>
           </a:ln>
         </p:spPr>
+        <p:txBody>
+          <a:bodyPr/>
+          <a:p/>
+        </p:txBody>
       </p:sp>
       <p:sp>
         <p:nvSpPr>
@@ -7814,6 +7922,10 @@
           </a:solidFill>
           <a:ln/>
         </p:spPr>
+        <p:txBody>
+          <a:bodyPr/>
+          <a:p/>
+        </p:txBody>
       </p:sp>
       <p:sp>
         <p:nvSpPr>
@@ -7877,6 +7989,10 @@
             <a:tailEnd type="triangle"/>
           </a:ln>
         </p:spPr>
+        <p:txBody>
+          <a:bodyPr/>
+          <a:p/>
+        </p:txBody>
       </p:sp>
       <p:sp>
         <p:nvSpPr>
@@ -7899,6 +8015,10 @@
           </a:solidFill>
           <a:ln/>
         </p:spPr>
+        <p:txBody>
+          <a:bodyPr/>
+          <a:p/>
+        </p:txBody>
       </p:sp>
       <p:sp>
         <p:nvSpPr>
@@ -8323,6 +8443,10 @@
           </a:solidFill>
           <a:ln/>
         </p:spPr>
+        <p:txBody>
+          <a:bodyPr/>
+          <a:p/>
+        </p:txBody>
       </p:sp>
       <p:sp>
         <p:nvSpPr>
@@ -8474,7 +8598,7 @@
                 <a:ea typeface="微软雅黑" pitchFamily="34" charset="-122"/>
                 <a:cs typeface="微软雅黑" pitchFamily="34" charset="-120"/>
               </a:rPr>
-              <a:t>帮扶管理信息系统 v1.11.2</a:t>
+              <a:t>帮扶管理信息系统 v1.11.6</a:t>
             </a:r>
             <a:endParaRPr lang="en-US" sz="1050" dirty="0"/>
           </a:p>
@@ -8508,6 +8632,10 @@
             </a:outerShdw>
           </a:effectLst>
         </p:spPr>
+        <p:txBody>
+          <a:bodyPr/>
+          <a:p/>
+        </p:txBody>
       </p:sp>
       <p:sp>
         <p:nvSpPr>
@@ -8654,6 +8782,10 @@
             </a:outerShdw>
           </a:effectLst>
         </p:spPr>
+        <p:txBody>
+          <a:bodyPr/>
+          <a:p/>
+        </p:txBody>
       </p:sp>
       <p:sp>
         <p:nvSpPr>
@@ -8800,6 +8932,10 @@
             </a:outerShdw>
           </a:effectLst>
         </p:spPr>
+        <p:txBody>
+          <a:bodyPr/>
+          <a:p/>
+        </p:txBody>
       </p:sp>
       <p:sp>
         <p:nvSpPr>
@@ -8946,6 +9082,10 @@
             </a:outerShdw>
           </a:effectLst>
         </p:spPr>
+        <p:txBody>
+          <a:bodyPr/>
+          <a:p/>
+        </p:txBody>
       </p:sp>
       <p:sp>
         <p:nvSpPr>
@@ -9092,6 +9232,10 @@
             </a:outerShdw>
           </a:effectLst>
         </p:spPr>
+        <p:txBody>
+          <a:bodyPr/>
+          <a:p/>
+        </p:txBody>
       </p:sp>
       <p:sp>
         <p:nvSpPr>
@@ -9238,6 +9382,10 @@
             </a:outerShdw>
           </a:effectLst>
         </p:spPr>
+        <p:txBody>
+          <a:bodyPr/>
+          <a:p/>
+        </p:txBody>
       </p:sp>
       <p:sp>
         <p:nvSpPr>
@@ -9446,6 +9594,10 @@
           </a:solidFill>
           <a:ln/>
         </p:spPr>
+        <p:txBody>
+          <a:bodyPr/>
+          <a:p/>
+        </p:txBody>
       </p:sp>
       <p:sp>
         <p:nvSpPr>
@@ -9597,7 +9749,7 @@
                 <a:ea typeface="微软雅黑" pitchFamily="34" charset="-122"/>
                 <a:cs typeface="微软雅黑" pitchFamily="34" charset="-120"/>
               </a:rPr>
-              <a:t>帮扶管理信息系统 v1.11.2</a:t>
+              <a:t>帮扶管理信息系统 v1.11.6</a:t>
             </a:r>
             <a:endParaRPr lang="en-US" sz="1050" dirty="0"/>
           </a:p>
@@ -9631,6 +9783,10 @@
             </a:outerShdw>
           </a:effectLst>
         </p:spPr>
+        <p:txBody>
+          <a:bodyPr/>
+          <a:p/>
+        </p:txBody>
       </p:sp>
       <p:sp>
         <p:nvSpPr>
@@ -9826,6 +9982,10 @@
             </a:outerShdw>
           </a:effectLst>
         </p:spPr>
+        <p:txBody>
+          <a:bodyPr/>
+          <a:p/>
+        </p:txBody>
       </p:sp>
       <p:sp>
         <p:nvSpPr>
@@ -10044,6 +10204,10 @@
           </a:solidFill>
           <a:ln/>
         </p:spPr>
+        <p:txBody>
+          <a:bodyPr/>
+          <a:p/>
+        </p:txBody>
       </p:sp>
       <p:sp>
         <p:nvSpPr>
@@ -10195,7 +10359,7 @@
                 <a:ea typeface="微软雅黑" pitchFamily="34" charset="-122"/>
                 <a:cs typeface="微软雅黑" pitchFamily="34" charset="-120"/>
               </a:rPr>
-              <a:t>帮扶管理信息系统 v1.11.2</a:t>
+              <a:t>帮扶管理信息系统 v1.11.6</a:t>
             </a:r>
             <a:endParaRPr lang="en-US" sz="1050" dirty="0"/>
           </a:p>
@@ -10222,6 +10386,10 @@
           </a:solidFill>
           <a:ln/>
         </p:spPr>
+        <p:txBody>
+          <a:bodyPr/>
+          <a:p/>
+        </p:txBody>
       </p:sp>
       <p:sp>
         <p:nvSpPr>
@@ -10283,6 +10451,10 @@
           </a:solidFill>
           <a:ln/>
         </p:spPr>
+        <p:txBody>
+          <a:bodyPr/>
+          <a:p/>
+        </p:txBody>
       </p:sp>
       <p:sp>
         <p:nvSpPr>
@@ -10344,6 +10516,10 @@
           </a:solidFill>
           <a:ln/>
         </p:spPr>
+        <p:txBody>
+          <a:bodyPr/>
+          <a:p/>
+        </p:txBody>
       </p:sp>
       <p:sp>
         <p:nvSpPr>
@@ -10405,6 +10581,10 @@
           </a:solidFill>
           <a:ln/>
         </p:spPr>
+        <p:txBody>
+          <a:bodyPr/>
+          <a:p/>
+        </p:txBody>
       </p:sp>
       <p:sp>
         <p:nvSpPr>
@@ -10466,6 +10646,10 @@
           </a:solidFill>
           <a:ln/>
         </p:spPr>
+        <p:txBody>
+          <a:bodyPr/>
+          <a:p/>
+        </p:txBody>
       </p:sp>
       <p:sp>
         <p:nvSpPr>
@@ -10527,6 +10711,10 @@
           </a:solidFill>
           <a:ln/>
         </p:spPr>
+        <p:txBody>
+          <a:bodyPr/>
+          <a:p/>
+        </p:txBody>
       </p:sp>
       <p:sp>
         <p:nvSpPr>
@@ -10588,6 +10776,10 @@
           </a:solidFill>
           <a:ln/>
         </p:spPr>
+        <p:txBody>
+          <a:bodyPr/>
+          <a:p/>
+        </p:txBody>
       </p:sp>
       <p:sp>
         <p:nvSpPr>
@@ -10649,6 +10841,10 @@
           </a:solidFill>
           <a:ln/>
         </p:spPr>
+        <p:txBody>
+          <a:bodyPr/>
+          <a:p/>
+        </p:txBody>
       </p:sp>
       <p:sp>
         <p:nvSpPr>
@@ -10846,6 +11042,10 @@
           </a:solidFill>
           <a:ln/>
         </p:spPr>
+        <p:txBody>
+          <a:bodyPr/>
+          <a:p/>
+        </p:txBody>
       </p:sp>
       <p:sp>
         <p:nvSpPr>
@@ -10997,7 +11197,7 @@
                 <a:ea typeface="微软雅黑" pitchFamily="34" charset="-122"/>
                 <a:cs typeface="微软雅黑" pitchFamily="34" charset="-120"/>
               </a:rPr>
-              <a:t>帮扶管理信息系统 v1.11.2</a:t>
+              <a:t>帮扶管理信息系统 v1.11.6</a:t>
             </a:r>
             <a:endParaRPr lang="en-US" sz="1050" dirty="0"/>
           </a:p>
@@ -11022,6 +11222,10 @@
           </a:solidFill>
           <a:ln/>
         </p:spPr>
+        <p:txBody>
+          <a:bodyPr/>
+          <a:p/>
+        </p:txBody>
       </p:sp>
       <p:sp>
         <p:nvSpPr>
@@ -11081,6 +11285,10 @@
           </a:solidFill>
           <a:ln/>
         </p:spPr>
+        <p:txBody>
+          <a:bodyPr/>
+          <a:p/>
+        </p:txBody>
       </p:sp>
       <p:sp>
         <p:nvSpPr>
@@ -11140,6 +11348,10 @@
           </a:solidFill>
           <a:ln/>
         </p:spPr>
+        <p:txBody>
+          <a:bodyPr/>
+          <a:p/>
+        </p:txBody>
       </p:sp>
       <p:sp>
         <p:nvSpPr>
@@ -11199,6 +11411,10 @@
           </a:solidFill>
           <a:ln/>
         </p:spPr>
+        <p:txBody>
+          <a:bodyPr/>
+          <a:p/>
+        </p:txBody>
       </p:sp>
       <p:sp>
         <p:nvSpPr>
@@ -11258,6 +11474,10 @@
           </a:solidFill>
           <a:ln/>
         </p:spPr>
+        <p:txBody>
+          <a:bodyPr/>
+          <a:p/>
+        </p:txBody>
       </p:sp>
       <p:sp>
         <p:nvSpPr>
@@ -11317,6 +11537,10 @@
           </a:solidFill>
           <a:ln/>
         </p:spPr>
+        <p:txBody>
+          <a:bodyPr/>
+          <a:p/>
+        </p:txBody>
       </p:sp>
       <p:sp>
         <p:nvSpPr>
@@ -11535,6 +11759,10 @@
           </a:solidFill>
           <a:ln/>
         </p:spPr>
+        <p:txBody>
+          <a:bodyPr/>
+          <a:p/>
+        </p:txBody>
       </p:sp>
       <p:sp>
         <p:nvSpPr>
@@ -11686,7 +11914,7 @@
                 <a:ea typeface="微软雅黑" pitchFamily="34" charset="-122"/>
                 <a:cs typeface="微软雅黑" pitchFamily="34" charset="-120"/>
               </a:rPr>
-              <a:t>帮扶管理信息系统 v1.11.2</a:t>
+              <a:t>帮扶管理信息系统 v1.11.6</a:t>
             </a:r>
             <a:endParaRPr lang="en-US" sz="1050" dirty="0"/>
           </a:p>
@@ -11711,6 +11939,10 @@
           </a:solidFill>
           <a:ln/>
         </p:spPr>
+        <p:txBody>
+          <a:bodyPr/>
+          <a:p/>
+        </p:txBody>
       </p:sp>
       <p:sp>
         <p:nvSpPr>
@@ -11813,6 +12045,10 @@
             <a:tailEnd type="triangle"/>
           </a:ln>
         </p:spPr>
+        <p:txBody>
+          <a:bodyPr/>
+          <a:p/>
+        </p:txBody>
       </p:sp>
       <p:sp>
         <p:nvSpPr>
@@ -11833,6 +12069,10 @@
           </a:solidFill>
           <a:ln/>
         </p:spPr>
+        <p:txBody>
+          <a:bodyPr/>
+          <a:p/>
+        </p:txBody>
       </p:sp>
       <p:sp>
         <p:nvSpPr>
@@ -11935,6 +12175,10 @@
             <a:tailEnd type="triangle"/>
           </a:ln>
         </p:spPr>
+        <p:txBody>
+          <a:bodyPr/>
+          <a:p/>
+        </p:txBody>
       </p:sp>
       <p:sp>
         <p:nvSpPr>
@@ -11955,6 +12199,10 @@
           </a:solidFill>
           <a:ln/>
         </p:spPr>
+        <p:txBody>
+          <a:bodyPr/>
+          <a:p/>
+        </p:txBody>
       </p:sp>
       <p:sp>
         <p:nvSpPr>
@@ -12057,6 +12305,10 @@
             <a:tailEnd type="triangle"/>
           </a:ln>
         </p:spPr>
+        <p:txBody>
+          <a:bodyPr/>
+          <a:p/>
+        </p:txBody>
       </p:sp>
       <p:sp>
         <p:nvSpPr>
@@ -12077,6 +12329,10 @@
           </a:solidFill>
           <a:ln/>
         </p:spPr>
+        <p:txBody>
+          <a:bodyPr/>
+          <a:p/>
+        </p:txBody>
       </p:sp>
       <p:sp>
         <p:nvSpPr>
@@ -12179,6 +12435,10 @@
             <a:tailEnd type="triangle"/>
           </a:ln>
         </p:spPr>
+        <p:txBody>
+          <a:bodyPr/>
+          <a:p/>
+        </p:txBody>
       </p:sp>
       <p:sp>
         <p:nvSpPr>
@@ -12199,6 +12459,10 @@
           </a:solidFill>
           <a:ln/>
         </p:spPr>
+        <p:txBody>
+          <a:bodyPr/>
+          <a:p/>
+        </p:txBody>
       </p:sp>
       <p:sp>
         <p:nvSpPr>
@@ -12301,6 +12565,10 @@
             <a:tailEnd type="triangle"/>
           </a:ln>
         </p:spPr>
+        <p:txBody>
+          <a:bodyPr/>
+          <a:p/>
+        </p:txBody>
       </p:sp>
       <p:sp>
         <p:nvSpPr>
@@ -12321,6 +12589,10 @@
           </a:solidFill>
           <a:ln/>
         </p:spPr>
+        <p:txBody>
+          <a:bodyPr/>
+          <a:p/>
+        </p:txBody>
       </p:sp>
       <p:sp>
         <p:nvSpPr>
@@ -12423,6 +12695,10 @@
             <a:tailEnd type="triangle"/>
           </a:ln>
         </p:spPr>
+        <p:txBody>
+          <a:bodyPr/>
+          <a:p/>
+        </p:txBody>
       </p:sp>
       <p:sp>
         <p:nvSpPr>
@@ -12443,6 +12719,10 @@
           </a:solidFill>
           <a:ln/>
         </p:spPr>
+        <p:txBody>
+          <a:bodyPr/>
+          <a:p/>
+        </p:txBody>
       </p:sp>
       <p:sp>
         <p:nvSpPr>
@@ -12545,6 +12825,10 @@
             <a:tailEnd type="triangle"/>
           </a:ln>
         </p:spPr>
+        <p:txBody>
+          <a:bodyPr/>
+          <a:p/>
+        </p:txBody>
       </p:sp>
       <p:sp>
         <p:nvSpPr>
@@ -12565,6 +12849,10 @@
           </a:solidFill>
           <a:ln/>
         </p:spPr>
+        <p:txBody>
+          <a:bodyPr/>
+          <a:p/>
+        </p:txBody>
       </p:sp>
       <p:sp>
         <p:nvSpPr>
@@ -12672,6 +12960,10 @@
             </a:outerShdw>
           </a:effectLst>
         </p:spPr>
+        <p:txBody>
+          <a:bodyPr/>
+          <a:p/>
+        </p:txBody>
       </p:sp>
       <p:sp>
         <p:nvSpPr>
@@ -12825,6 +13117,10 @@
             </a:outerShdw>
           </a:effectLst>
         </p:spPr>
+        <p:txBody>
+          <a:bodyPr/>
+          <a:p/>
+        </p:txBody>
       </p:sp>
       <p:sp>
         <p:nvSpPr>
@@ -13081,6 +13377,10 @@
           </a:solidFill>
           <a:ln/>
         </p:spPr>
+        <p:txBody>
+          <a:bodyPr/>
+          <a:p/>
+        </p:txBody>
       </p:sp>
       <p:sp>
         <p:nvSpPr>
@@ -13220,6 +13520,10 @@
           </a:solidFill>
           <a:ln/>
         </p:spPr>
+        <p:txBody>
+          <a:bodyPr/>
+          <a:p/>
+        </p:txBody>
       </p:sp>
       <p:sp>
         <p:nvSpPr>
@@ -13359,6 +13663,10 @@
           </a:solidFill>
           <a:ln/>
         </p:spPr>
+        <p:txBody>
+          <a:bodyPr/>
+          <a:p/>
+        </p:txBody>
       </p:sp>
       <p:sp>
         <p:nvSpPr>
@@ -13498,6 +13806,10 @@
           </a:solidFill>
           <a:ln/>
         </p:spPr>
+        <p:txBody>
+          <a:bodyPr/>
+          <a:p/>
+        </p:txBody>
       </p:sp>
       <p:sp>
         <p:nvSpPr>
@@ -13637,6 +13949,10 @@
           </a:solidFill>
           <a:ln/>
         </p:spPr>
+        <p:txBody>
+          <a:bodyPr/>
+          <a:p/>
+        </p:txBody>
       </p:sp>
       <p:sp>
         <p:nvSpPr>
@@ -13776,6 +14092,10 @@
           </a:solidFill>
           <a:ln/>
         </p:spPr>
+        <p:txBody>
+          <a:bodyPr/>
+          <a:p/>
+        </p:txBody>
       </p:sp>
       <p:sp>
         <p:nvSpPr>
@@ -13945,6 +14265,10 @@
           </a:solidFill>
           <a:ln/>
         </p:spPr>
+        <p:txBody>
+          <a:bodyPr/>
+          <a:p/>
+        </p:txBody>
       </p:sp>
       <p:sp>
         <p:nvSpPr>
@@ -14096,7 +14420,7 @@
                 <a:ea typeface="微软雅黑" pitchFamily="34" charset="-122"/>
                 <a:cs typeface="微软雅黑" pitchFamily="34" charset="-120"/>
               </a:rPr>
-              <a:t>帮扶管理信息系统 v1.11.2</a:t>
+              <a:t>帮扶管理信息系统 v1.11.6</a:t>
             </a:r>
             <a:endParaRPr lang="en-US" sz="1050" dirty="0"/>
           </a:p>
@@ -14130,6 +14454,10 @@
             </a:outerShdw>
           </a:effectLst>
         </p:spPr>
+        <p:txBody>
+          <a:bodyPr/>
+          <a:p/>
+        </p:txBody>
       </p:sp>
       <p:sp>
         <p:nvSpPr>
@@ -14325,6 +14653,10 @@
             </a:outerShdw>
           </a:effectLst>
         </p:spPr>
+        <p:txBody>
+          <a:bodyPr/>
+          <a:p/>
+        </p:txBody>
       </p:sp>
       <p:sp>
         <p:nvSpPr>
@@ -14543,6 +14875,10 @@
           </a:solidFill>
           <a:ln/>
         </p:spPr>
+        <p:txBody>
+          <a:bodyPr/>
+          <a:p/>
+        </p:txBody>
       </p:sp>
       <p:sp>
         <p:nvSpPr>
@@ -14694,7 +15030,7 @@
                 <a:ea typeface="微软雅黑" pitchFamily="34" charset="-122"/>
                 <a:cs typeface="微软雅黑" pitchFamily="34" charset="-120"/>
               </a:rPr>
-              <a:t>帮扶管理信息系统 v1.11.2</a:t>
+              <a:t>帮扶管理信息系统 v1.11.6</a:t>
             </a:r>
             <a:endParaRPr lang="en-US" sz="1050" dirty="0"/>
           </a:p>
@@ -14719,6 +15055,10 @@
           </a:solidFill>
           <a:ln/>
         </p:spPr>
+        <p:txBody>
+          <a:bodyPr/>
+          <a:p/>
+        </p:txBody>
       </p:sp>
       <p:sp>
         <p:nvSpPr>
@@ -14778,6 +15118,10 @@
           </a:solidFill>
           <a:ln/>
         </p:spPr>
+        <p:txBody>
+          <a:bodyPr/>
+          <a:p/>
+        </p:txBody>
       </p:sp>
       <p:sp>
         <p:nvSpPr>
@@ -14837,6 +15181,10 @@
           </a:solidFill>
           <a:ln/>
         </p:spPr>
+        <p:txBody>
+          <a:bodyPr/>
+          <a:p/>
+        </p:txBody>
       </p:sp>
       <p:sp>
         <p:nvSpPr>
@@ -14896,6 +15244,10 @@
           </a:solidFill>
           <a:ln/>
         </p:spPr>
+        <p:txBody>
+          <a:bodyPr/>
+          <a:p/>
+        </p:txBody>
       </p:sp>
       <p:sp>
         <p:nvSpPr>
@@ -14955,6 +15307,10 @@
           </a:solidFill>
           <a:ln/>
         </p:spPr>
+        <p:txBody>
+          <a:bodyPr/>
+          <a:p/>
+        </p:txBody>
       </p:sp>
       <p:sp>
         <p:nvSpPr>
@@ -15173,6 +15529,10 @@
           </a:solidFill>
           <a:ln/>
         </p:spPr>
+        <p:txBody>
+          <a:bodyPr/>
+          <a:p/>
+        </p:txBody>
       </p:sp>
       <p:sp>
         <p:nvSpPr>
@@ -15324,7 +15684,7 @@
                 <a:ea typeface="微软雅黑" pitchFamily="34" charset="-122"/>
                 <a:cs typeface="微软雅黑" pitchFamily="34" charset="-120"/>
               </a:rPr>
-              <a:t>帮扶管理信息系统 v1.11.2</a:t>
+              <a:t>帮扶管理信息系统 v1.11.6</a:t>
             </a:r>
             <a:endParaRPr lang="en-US" sz="1050" dirty="0"/>
           </a:p>
@@ -15358,6 +15718,10 @@
             </a:outerShdw>
           </a:effectLst>
         </p:spPr>
+        <p:txBody>
+          <a:bodyPr/>
+          <a:p/>
+        </p:txBody>
       </p:sp>
       <p:sp>
         <p:nvSpPr>
@@ -15532,6 +15896,10 @@
             </a:outerShdw>
           </a:effectLst>
         </p:spPr>
+        <p:txBody>
+          <a:bodyPr/>
+          <a:p/>
+        </p:txBody>
       </p:sp>
       <p:sp>
         <p:nvSpPr>
@@ -15706,6 +16074,10 @@
             </a:outerShdw>
           </a:effectLst>
         </p:spPr>
+        <p:txBody>
+          <a:bodyPr/>
+          <a:p/>
+        </p:txBody>
       </p:sp>
       <p:sp>
         <p:nvSpPr>
@@ -15836,6 +16208,10 @@
           </a:solidFill>
           <a:ln/>
         </p:spPr>
+        <p:txBody>
+          <a:bodyPr/>
+          <a:p/>
+        </p:txBody>
       </p:sp>
       <p:sp>
         <p:nvSpPr>
@@ -15987,7 +16363,7 @@
                 <a:ea typeface="微软雅黑" pitchFamily="34" charset="-122"/>
                 <a:cs typeface="微软雅黑" pitchFamily="34" charset="-120"/>
               </a:rPr>
-              <a:t>帮扶管理信息系统 v1.11.2</a:t>
+              <a:t>帮扶管理信息系统 v1.11.6</a:t>
             </a:r>
             <a:endParaRPr lang="en-US" sz="1050" dirty="0"/>
           </a:p>
@@ -16021,6 +16397,10 @@
             </a:outerShdw>
           </a:effectLst>
         </p:spPr>
+        <p:txBody>
+          <a:bodyPr/>
+          <a:p/>
+        </p:txBody>
       </p:sp>
       <p:sp>
         <p:nvSpPr>
@@ -16128,6 +16508,10 @@
             </a:outerShdw>
           </a:effectLst>
         </p:spPr>
+        <p:txBody>
+          <a:bodyPr/>
+          <a:p/>
+        </p:txBody>
       </p:sp>
       <p:sp>
         <p:nvSpPr>
@@ -16235,6 +16619,10 @@
             </a:outerShdw>
           </a:effectLst>
         </p:spPr>
+        <p:txBody>
+          <a:bodyPr/>
+          <a:p/>
+        </p:txBody>
       </p:sp>
       <p:sp>
         <p:nvSpPr>
@@ -16342,6 +16730,10 @@
             </a:outerShdw>
           </a:effectLst>
         </p:spPr>
+        <p:txBody>
+          <a:bodyPr/>
+          <a:p/>
+        </p:txBody>
       </p:sp>
       <p:sp>
         <p:nvSpPr>
@@ -16449,6 +16841,10 @@
             </a:outerShdw>
           </a:effectLst>
         </p:spPr>
+        <p:txBody>
+          <a:bodyPr/>
+          <a:p/>
+        </p:txBody>
       </p:sp>
       <p:sp>
         <p:nvSpPr>
@@ -16556,6 +16952,10 @@
             </a:outerShdw>
           </a:effectLst>
         </p:spPr>
+        <p:txBody>
+          <a:bodyPr/>
+          <a:p/>
+        </p:txBody>
       </p:sp>
       <p:sp>
         <p:nvSpPr>
@@ -16686,6 +17086,10 @@
           </a:solidFill>
           <a:ln/>
         </p:spPr>
+        <p:txBody>
+          <a:bodyPr/>
+          <a:p/>
+        </p:txBody>
       </p:sp>
       <p:sp>
         <p:nvSpPr>
@@ -16837,7 +17241,7 @@
                 <a:ea typeface="微软雅黑" pitchFamily="34" charset="-122"/>
                 <a:cs typeface="微软雅黑" pitchFamily="34" charset="-120"/>
               </a:rPr>
-              <a:t>帮扶管理信息系统 v1.11.2</a:t>
+              <a:t>帮扶管理信息系统 v1.11.6</a:t>
             </a:r>
             <a:endParaRPr lang="en-US" sz="1050" dirty="0"/>
           </a:p>
@@ -16871,6 +17275,10 @@
             </a:outerShdw>
           </a:effectLst>
         </p:spPr>
+        <p:txBody>
+          <a:bodyPr/>
+          <a:p/>
+        </p:txBody>
       </p:sp>
       <p:sp>
         <p:nvSpPr>
@@ -16978,6 +17386,10 @@
             </a:outerShdw>
           </a:effectLst>
         </p:spPr>
+        <p:txBody>
+          <a:bodyPr/>
+          <a:p/>
+        </p:txBody>
       </p:sp>
       <p:sp>
         <p:nvSpPr>
@@ -17085,6 +17497,10 @@
             </a:outerShdw>
           </a:effectLst>
         </p:spPr>
+        <p:txBody>
+          <a:bodyPr/>
+          <a:p/>
+        </p:txBody>
       </p:sp>
       <p:sp>
         <p:nvSpPr>
@@ -17192,6 +17608,10 @@
             </a:outerShdw>
           </a:effectLst>
         </p:spPr>
+        <p:txBody>
+          <a:bodyPr/>
+          <a:p/>
+        </p:txBody>
       </p:sp>
       <p:sp>
         <p:nvSpPr>
@@ -17299,6 +17719,10 @@
             </a:outerShdw>
           </a:effectLst>
         </p:spPr>
+        <p:txBody>
+          <a:bodyPr/>
+          <a:p/>
+        </p:txBody>
       </p:sp>
       <p:sp>
         <p:nvSpPr>
@@ -17406,6 +17830,10 @@
             </a:outerShdw>
           </a:effectLst>
         </p:spPr>
+        <p:txBody>
+          <a:bodyPr/>
+          <a:p/>
+        </p:txBody>
       </p:sp>
       <p:sp>
         <p:nvSpPr>
@@ -17830,6 +18258,10 @@
           </a:solidFill>
           <a:ln/>
         </p:spPr>
+        <p:txBody>
+          <a:bodyPr/>
+          <a:p/>
+        </p:txBody>
       </p:sp>
       <p:sp>
         <p:nvSpPr>
@@ -17981,7 +18413,7 @@
                 <a:ea typeface="微软雅黑" pitchFamily="34" charset="-122"/>
                 <a:cs typeface="微软雅黑" pitchFamily="34" charset="-120"/>
               </a:rPr>
-              <a:t>帮扶管理信息系统 v1.11.2</a:t>
+              <a:t>帮扶管理信息系统 v1.11.6</a:t>
             </a:r>
             <a:endParaRPr lang="en-US" sz="1050" dirty="0"/>
           </a:p>
@@ -18015,6 +18447,10 @@
             </a:outerShdw>
           </a:effectLst>
         </p:spPr>
+        <p:txBody>
+          <a:bodyPr/>
+          <a:p/>
+        </p:txBody>
       </p:sp>
       <p:sp>
         <p:nvSpPr>
@@ -18037,6 +18473,10 @@
           </a:solidFill>
           <a:ln/>
         </p:spPr>
+        <p:txBody>
+          <a:bodyPr/>
+          <a:p/>
+        </p:txBody>
       </p:sp>
       <p:sp>
         <p:nvSpPr>
@@ -18183,6 +18623,10 @@
             </a:outerShdw>
           </a:effectLst>
         </p:spPr>
+        <p:txBody>
+          <a:bodyPr/>
+          <a:p/>
+        </p:txBody>
       </p:sp>
       <p:sp>
         <p:nvSpPr>
@@ -18205,6 +18649,10 @@
           </a:solidFill>
           <a:ln/>
         </p:spPr>
+        <p:txBody>
+          <a:bodyPr/>
+          <a:p/>
+        </p:txBody>
       </p:sp>
       <p:sp>
         <p:nvSpPr>
@@ -18351,6 +18799,10 @@
             </a:outerShdw>
           </a:effectLst>
         </p:spPr>
+        <p:txBody>
+          <a:bodyPr/>
+          <a:p/>
+        </p:txBody>
       </p:sp>
       <p:sp>
         <p:nvSpPr>
@@ -18373,6 +18825,10 @@
           </a:solidFill>
           <a:ln/>
         </p:spPr>
+        <p:txBody>
+          <a:bodyPr/>
+          <a:p/>
+        </p:txBody>
       </p:sp>
       <p:sp>
         <p:nvSpPr>
@@ -18519,6 +18975,10 @@
             </a:outerShdw>
           </a:effectLst>
         </p:spPr>
+        <p:txBody>
+          <a:bodyPr/>
+          <a:p/>
+        </p:txBody>
       </p:sp>
       <p:sp>
         <p:nvSpPr>
@@ -18541,6 +19001,10 @@
           </a:solidFill>
           <a:ln/>
         </p:spPr>
+        <p:txBody>
+          <a:bodyPr/>
+          <a:p/>
+        </p:txBody>
       </p:sp>
       <p:sp>
         <p:nvSpPr>
@@ -18795,6 +19259,10 @@
           </a:solidFill>
           <a:ln/>
         </p:spPr>
+        <p:txBody>
+          <a:bodyPr/>
+          <a:p/>
+        </p:txBody>
       </p:sp>
       <p:sp>
         <p:nvSpPr>
@@ -18946,7 +19414,7 @@
                 <a:ea typeface="微软雅黑" pitchFamily="34" charset="-122"/>
                 <a:cs typeface="微软雅黑" pitchFamily="34" charset="-120"/>
               </a:rPr>
-              <a:t>帮扶管理信息系统 v1.11.2</a:t>
+              <a:t>帮扶管理信息系统 v1.11.6</a:t>
             </a:r>
             <a:endParaRPr lang="en-US" sz="1050" dirty="0"/>
           </a:p>
@@ -18980,6 +19448,10 @@
             </a:outerShdw>
           </a:effectLst>
         </p:spPr>
+        <p:txBody>
+          <a:bodyPr/>
+          <a:p/>
+        </p:txBody>
       </p:sp>
       <p:sp>
         <p:nvSpPr>
@@ -19126,6 +19598,10 @@
             </a:outerShdw>
           </a:effectLst>
         </p:spPr>
+        <p:txBody>
+          <a:bodyPr/>
+          <a:p/>
+        </p:txBody>
       </p:sp>
       <p:sp>
         <p:nvSpPr>
@@ -19272,6 +19748,10 @@
             </a:outerShdw>
           </a:effectLst>
         </p:spPr>
+        <p:txBody>
+          <a:bodyPr/>
+          <a:p/>
+        </p:txBody>
       </p:sp>
       <p:sp>
         <p:nvSpPr>
@@ -19418,6 +19898,10 @@
             </a:outerShdw>
           </a:effectLst>
         </p:spPr>
+        <p:txBody>
+          <a:bodyPr/>
+          <a:p/>
+        </p:txBody>
       </p:sp>
       <p:sp>
         <p:nvSpPr>
@@ -19594,6 +20078,10 @@
           </a:solidFill>
           <a:ln/>
         </p:spPr>
+        <p:txBody>
+          <a:bodyPr/>
+          <a:p/>
+        </p:txBody>
       </p:sp>
       <p:sp>
         <p:nvSpPr>
@@ -19745,7 +20233,7 @@
                 <a:ea typeface="微软雅黑" pitchFamily="34" charset="-122"/>
                 <a:cs typeface="微软雅黑" pitchFamily="34" charset="-120"/>
               </a:rPr>
-              <a:t>帮扶管理信息系统 v1.11.2</a:t>
+              <a:t>帮扶管理信息系统 v1.11.6</a:t>
             </a:r>
             <a:endParaRPr lang="en-US" sz="1050" dirty="0"/>
           </a:p>
@@ -19779,6 +20267,10 @@
             </a:outerShdw>
           </a:effectLst>
         </p:spPr>
+        <p:txBody>
+          <a:bodyPr/>
+          <a:p/>
+        </p:txBody>
       </p:sp>
       <p:sp>
         <p:nvSpPr>
@@ -19840,6 +20332,10 @@
           </a:solidFill>
           <a:ln/>
         </p:spPr>
+        <p:txBody>
+          <a:bodyPr/>
+          <a:p/>
+        </p:txBody>
       </p:sp>
       <p:sp>
         <p:nvSpPr>
@@ -19903,6 +20399,10 @@
             <a:tailEnd type="triangle"/>
           </a:ln>
         </p:spPr>
+        <p:txBody>
+          <a:bodyPr/>
+          <a:p/>
+        </p:txBody>
       </p:sp>
       <p:sp>
         <p:nvSpPr>
@@ -19925,6 +20425,10 @@
           </a:solidFill>
           <a:ln/>
         </p:spPr>
+        <p:txBody>
+          <a:bodyPr/>
+          <a:p/>
+        </p:txBody>
       </p:sp>
       <p:sp>
         <p:nvSpPr>
@@ -19988,6 +20492,10 @@
             <a:tailEnd type="triangle"/>
           </a:ln>
         </p:spPr>
+        <p:txBody>
+          <a:bodyPr/>
+          <a:p/>
+        </p:txBody>
       </p:sp>
       <p:sp>
         <p:nvSpPr>
@@ -20010,6 +20518,10 @@
           </a:solidFill>
           <a:ln/>
         </p:spPr>
+        <p:txBody>
+          <a:bodyPr/>
+          <a:p/>
+        </p:txBody>
       </p:sp>
       <p:sp>
         <p:nvSpPr>
@@ -20142,6 +20654,10 @@
             </a:outerShdw>
           </a:effectLst>
         </p:spPr>
+        <p:txBody>
+          <a:bodyPr/>
+          <a:p/>
+        </p:txBody>
       </p:sp>
       <p:sp>
         <p:nvSpPr>
@@ -20316,6 +20832,10 @@
             </a:outerShdw>
           </a:effectLst>
         </p:spPr>
+        <p:txBody>
+          <a:bodyPr/>
+          <a:p/>
+        </p:txBody>
       </p:sp>
       <p:sp>
         <p:nvSpPr>
@@ -20446,6 +20966,10 @@
           </a:solidFill>
           <a:ln/>
         </p:spPr>
+        <p:txBody>
+          <a:bodyPr/>
+          <a:p/>
+        </p:txBody>
       </p:sp>
       <p:sp>
         <p:nvSpPr>
@@ -20597,7 +21121,7 @@
                 <a:ea typeface="微软雅黑" pitchFamily="34" charset="-122"/>
                 <a:cs typeface="微软雅黑" pitchFamily="34" charset="-120"/>
               </a:rPr>
-              <a:t>帮扶管理信息系统 v1.11.2</a:t>
+              <a:t>帮扶管理信息系统 v1.11.6</a:t>
             </a:r>
             <a:endParaRPr lang="en-US" sz="1050" dirty="0"/>
           </a:p>
@@ -20622,6 +21146,10 @@
           </a:solidFill>
           <a:ln/>
         </p:spPr>
+        <p:txBody>
+          <a:bodyPr/>
+          <a:p/>
+        </p:txBody>
       </p:sp>
       <p:sp>
         <p:nvSpPr>
@@ -20720,6 +21248,10 @@
           </a:solidFill>
           <a:ln/>
         </p:spPr>
+        <p:txBody>
+          <a:bodyPr/>
+          <a:p/>
+        </p:txBody>
       </p:sp>
       <p:sp>
         <p:nvSpPr>
@@ -20818,6 +21350,10 @@
           </a:solidFill>
           <a:ln/>
         </p:spPr>
+        <p:txBody>
+          <a:bodyPr/>
+          <a:p/>
+        </p:txBody>
       </p:sp>
       <p:sp>
         <p:nvSpPr>
@@ -20916,6 +21452,10 @@
           </a:solidFill>
           <a:ln/>
         </p:spPr>
+        <p:txBody>
+          <a:bodyPr/>
+          <a:p/>
+        </p:txBody>
       </p:sp>
       <p:sp>
         <p:nvSpPr>
@@ -21014,6 +21554,10 @@
           </a:solidFill>
           <a:ln/>
         </p:spPr>
+        <p:txBody>
+          <a:bodyPr/>
+          <a:p/>
+        </p:txBody>
       </p:sp>
       <p:sp>
         <p:nvSpPr>
@@ -21112,6 +21656,10 @@
           </a:solidFill>
           <a:ln/>
         </p:spPr>
+        <p:txBody>
+          <a:bodyPr/>
+          <a:p/>
+        </p:txBody>
       </p:sp>
       <p:sp>
         <p:nvSpPr>
@@ -21536,6 +22084,10 @@
           </a:solidFill>
           <a:ln/>
         </p:spPr>
+        <p:txBody>
+          <a:bodyPr/>
+          <a:p/>
+        </p:txBody>
       </p:sp>
       <p:sp>
         <p:nvSpPr>
@@ -21687,7 +22239,7 @@
                 <a:ea typeface="微软雅黑" pitchFamily="34" charset="-122"/>
                 <a:cs typeface="微软雅黑" pitchFamily="34" charset="-120"/>
               </a:rPr>
-              <a:t>帮扶管理信息系统 v1.11.2</a:t>
+              <a:t>帮扶管理信息系统 v1.11.6</a:t>
             </a:r>
             <a:endParaRPr lang="en-US" sz="1050" dirty="0"/>
           </a:p>
@@ -21712,6 +22264,10 @@
           </a:solidFill>
           <a:ln/>
         </p:spPr>
+        <p:txBody>
+          <a:bodyPr/>
+          <a:p/>
+        </p:txBody>
       </p:sp>
       <p:sp>
         <p:nvSpPr>
@@ -21771,6 +22327,10 @@
           </a:solidFill>
           <a:ln/>
         </p:spPr>
+        <p:txBody>
+          <a:bodyPr/>
+          <a:p/>
+        </p:txBody>
       </p:sp>
       <p:sp>
         <p:nvSpPr>
@@ -21830,6 +22390,10 @@
           </a:solidFill>
           <a:ln/>
         </p:spPr>
+        <p:txBody>
+          <a:bodyPr/>
+          <a:p/>
+        </p:txBody>
       </p:sp>
       <p:sp>
         <p:nvSpPr>
@@ -21889,6 +22453,10 @@
           </a:solidFill>
           <a:ln/>
         </p:spPr>
+        <p:txBody>
+          <a:bodyPr/>
+          <a:p/>
+        </p:txBody>
       </p:sp>
       <p:sp>
         <p:nvSpPr>
@@ -21948,6 +22516,10 @@
           </a:solidFill>
           <a:ln/>
         </p:spPr>
+        <p:txBody>
+          <a:bodyPr/>
+          <a:p/>
+        </p:txBody>
       </p:sp>
       <p:sp>
         <p:nvSpPr>
@@ -22460,6 +23032,10 @@
           </a:solidFill>
           <a:ln/>
         </p:spPr>
+        <p:txBody>
+          <a:bodyPr/>
+          <a:p/>
+        </p:txBody>
       </p:sp>
       <p:sp>
         <p:nvSpPr>
@@ -22611,7 +23187,7 @@
                 <a:ea typeface="微软雅黑" pitchFamily="34" charset="-122"/>
                 <a:cs typeface="微软雅黑" pitchFamily="34" charset="-120"/>
               </a:rPr>
-              <a:t>帮扶管理信息系统 v1.11.2</a:t>
+              <a:t>帮扶管理信息系统 v1.11.6</a:t>
             </a:r>
             <a:endParaRPr lang="en-US" sz="1050" dirty="0"/>
           </a:p>
@@ -22666,7 +23242,7 @@
                 <a:ea typeface="微软雅黑" pitchFamily="34" charset="-122"/>
                 <a:cs typeface="微软雅黑" pitchFamily="34" charset="-120"/>
               </a:rPr>
-              <a:t>数据来源：v1.11.2 全量本地实测（2026-08-30）</a:t>
+              <a:t>数据来源：v1.11.6 全量本地实测（2026-08-30）</a:t>
             </a:r>
             <a:endParaRPr lang="en-US" sz="1100" dirty="0"/>
           </a:p>
@@ -22700,6 +23276,10 @@
             </a:outerShdw>
           </a:effectLst>
         </p:spPr>
+        <p:txBody>
+          <a:bodyPr/>
+          <a:p/>
+        </p:txBody>
       </p:sp>
       <p:sp>
         <p:nvSpPr>
@@ -22737,6 +23317,91 @@
               <a:t>测试纪律</a:t>
             </a:r>
             <a:endParaRPr lang="en-US" sz="1500" dirty="0"/>
+          </a:p>
+          <a:p>
+            <a:pPr indent="0" marL="0">
+              <a:buNone/>
+            </a:pPr>
+            <a:r>
+              <a:rPr lang="en-US" sz="1300" dirty="0">
+                <a:solidFill>
+                  <a:srgbClr val="5F6F66"/>
+                </a:solidFill>
+                <a:latin typeface="微软雅黑" pitchFamily="34" charset="0"/>
+                <a:ea typeface="微软雅黑" pitchFamily="34" charset="-122"/>
+                <a:cs typeface="微软雅黑" pitchFamily="34" charset="-120"/>
+              </a:rPr>
+              <a:t>后端覆盖率门禁 100%（可覆盖集口径，CI 硬阈值）</a:t>
+            </a:r>
+            <a:endParaRPr lang="en-US" sz="1300" dirty="0"/>
+          </a:p>
+          <a:p>
+            <a:pPr indent="0" marL="0">
+              <a:buNone/>
+            </a:pPr>
+            <a:r>
+              <a:rPr lang="en-US" sz="1300" dirty="0">
+                <a:solidFill>
+                  <a:srgbClr val="5F6F66"/>
+                </a:solidFill>
+                <a:latin typeface="微软雅黑" pitchFamily="34" charset="0"/>
+                <a:ea typeface="微软雅黑" pitchFamily="34" charset="-122"/>
+                <a:cs typeface="微软雅黑" pitchFamily="34" charset="-120"/>
+              </a:rPr>
+              <a:t>新增接口/页面必须配套测试（协作约定强制）</a:t>
+            </a:r>
+            <a:endParaRPr lang="en-US" sz="1300" dirty="0"/>
+          </a:p>
+          <a:p>
+            <a:pPr indent="0" marL="0">
+              <a:buNone/>
+            </a:pPr>
+            <a:r>
+              <a:rPr lang="en-US" sz="1300" dirty="0">
+                <a:solidFill>
+                  <a:srgbClr val="5F6F66"/>
+                </a:solidFill>
+                <a:latin typeface="微软雅黑" pitchFamily="34" charset="0"/>
+                <a:ea typeface="微软雅黑" pitchFamily="34" charset="-122"/>
+                <a:cs typeface="微软雅黑" pitchFamily="34" charset="-120"/>
+              </a:rPr>
+              <a:t>安全回归：限流签名 / loopback 门禁 / 错误不泄露 / PII 加密 / 组织守卫 均有专项锁定</a:t>
+            </a:r>
+            <a:endParaRPr lang="en-US" sz="1300" dirty="0"/>
+          </a:p>
+          <a:p>
+            <a:pPr indent="0" marL="0">
+              <a:buNone/>
+            </a:pPr>
+            <a:r>
+              <a:rPr lang="en-US" sz="1300" dirty="0">
+                <a:solidFill>
+                  <a:srgbClr val="5F6F66"/>
+                </a:solidFill>
+                <a:latin typeface="微软雅黑" pitchFamily="34" charset="0"/>
+                <a:ea typeface="微软雅黑" pitchFamily="34" charset="-122"/>
+                <a:cs typeface="微软雅黑" pitchFamily="34" charset="-120"/>
+              </a:rPr>
+              <a:t>深度探测循环：9 轮 252 项真实 HTTP 断言 + 150 项浏览器 E2E 入 CI 门禁，修复 9 个缺陷全部带回归锁定</a:t>
+            </a:r>
+            <a:endParaRPr lang="en-US" sz="1300" dirty="0"/>
+          </a:p>
+          <a:p>
+            <a:pPr indent="0" marL="0">
+              <a:buNone/>
+            </a:pPr>
+            <a:r>
+              <a:rPr lang="en-US" sz="1300" dirty="0">
+                <a:solidFill>
+                  <a:srgbClr val="5F6F66"/>
+                </a:solidFill>
+                <a:latin typeface="微软雅黑" pitchFamily="34" charset="0"/>
+                <a:ea typeface="微软雅黑" pitchFamily="34" charset="-122"/>
+                <a:cs typeface="微软雅黑" pitchFamily="34" charset="-120"/>
+              </a:rPr>
+              <a:t>前后端契约核对：334 个前端调用 0 断裂；已知 flaky 用例公开记录，不允许静默重试掩盖</a:t>
+            </a:r>
+            <a:endParaRPr lang="en-US" sz="1300" dirty="0"/>
           </a:p>
         </p:txBody>
       </p:sp>
@@ -22918,6 +23583,10 @@
           </a:solidFill>
           <a:ln/>
         </p:spPr>
+        <p:txBody>
+          <a:bodyPr/>
+          <a:p/>
+        </p:txBody>
       </p:sp>
       <p:sp>
         <p:nvSpPr>
@@ -23069,7 +23738,7 @@
                 <a:ea typeface="微软雅黑" pitchFamily="34" charset="-122"/>
                 <a:cs typeface="微软雅黑" pitchFamily="34" charset="-120"/>
               </a:rPr>
-              <a:t>帮扶管理信息系统 v1.11.2</a:t>
+              <a:t>帮扶管理信息系统 v1.11.6</a:t>
             </a:r>
             <a:endParaRPr lang="en-US" sz="1050" dirty="0"/>
           </a:p>
@@ -23096,6 +23765,10 @@
           </a:solidFill>
           <a:ln/>
         </p:spPr>
+        <p:txBody>
+          <a:bodyPr/>
+          <a:p/>
+        </p:txBody>
       </p:sp>
       <p:sp>
         <p:nvSpPr>
@@ -23169,7 +23842,7 @@
                 <a:ea typeface="微软雅黑" pitchFamily="34" charset="-122"/>
                 <a:cs typeface="微软雅黑" pitchFamily="34" charset="-120"/>
               </a:rPr>
-              <a:t>每次 PR：后端测试 + 前端测试 + flake8 + Codecov 覆盖率对比</a:t>
+              <a:t>六 job：后端/前端/lint/安全/静态分析 + E2E 浏览器套件 150 用例</a:t>
             </a:r>
             <a:endParaRPr lang="en-US" sz="1300" dirty="0"/>
           </a:p>
@@ -23196,6 +23869,10 @@
           </a:solidFill>
           <a:ln/>
         </p:spPr>
+        <p:txBody>
+          <a:bodyPr/>
+          <a:p/>
+        </p:txBody>
       </p:sp>
       <p:sp>
         <p:nvSpPr>
@@ -23296,6 +23973,10 @@
           </a:solidFill>
           <a:ln/>
         </p:spPr>
+        <p:txBody>
+          <a:bodyPr/>
+          <a:p/>
+        </p:txBody>
       </p:sp>
       <p:sp>
         <p:nvSpPr>
@@ -23396,6 +24077,10 @@
           </a:solidFill>
           <a:ln/>
         </p:spPr>
+        <p:txBody>
+          <a:bodyPr/>
+          <a:p/>
+        </p:txBody>
       </p:sp>
       <p:sp>
         <p:nvSpPr>
@@ -23565,6 +24250,10 @@
           </a:solidFill>
           <a:ln/>
         </p:spPr>
+        <p:txBody>
+          <a:bodyPr/>
+          <a:p/>
+        </p:txBody>
       </p:sp>
       <p:sp>
         <p:nvSpPr>
@@ -23716,7 +24405,7 @@
                 <a:ea typeface="微软雅黑" pitchFamily="34" charset="-122"/>
                 <a:cs typeface="微软雅黑" pitchFamily="34" charset="-120"/>
               </a:rPr>
-              <a:t>帮扶管理信息系统 v1.11.2</a:t>
+              <a:t>帮扶管理信息系统 v1.11.6</a:t>
             </a:r>
             <a:endParaRPr lang="en-US" sz="1050" dirty="0"/>
           </a:p>
@@ -23750,6 +24439,10 @@
             </a:outerShdw>
           </a:effectLst>
         </p:spPr>
+        <p:txBody>
+          <a:bodyPr/>
+          <a:p/>
+        </p:txBody>
       </p:sp>
       <p:sp>
         <p:nvSpPr>
@@ -23945,6 +24638,10 @@
             </a:outerShdw>
           </a:effectLst>
         </p:spPr>
+        <p:txBody>
+          <a:bodyPr/>
+          <a:p/>
+        </p:txBody>
       </p:sp>
       <p:sp>
         <p:nvSpPr>
@@ -24457,6 +25154,10 @@
           </a:solidFill>
           <a:ln/>
         </p:spPr>
+        <p:txBody>
+          <a:bodyPr/>
+          <a:p/>
+        </p:txBody>
       </p:sp>
       <p:sp>
         <p:nvSpPr>
@@ -24608,7 +25309,7 @@
                 <a:ea typeface="微软雅黑" pitchFamily="34" charset="-122"/>
                 <a:cs typeface="微软雅黑" pitchFamily="34" charset="-120"/>
               </a:rPr>
-              <a:t>帮扶管理信息系统 v1.11.2</a:t>
+              <a:t>帮扶管理信息系统 v1.11.6</a:t>
             </a:r>
             <a:endParaRPr lang="en-US" sz="1050" dirty="0"/>
           </a:p>
@@ -24642,6 +25343,10 @@
             </a:outerShdw>
           </a:effectLst>
         </p:spPr>
+        <p:txBody>
+          <a:bodyPr/>
+          <a:p/>
+        </p:txBody>
       </p:sp>
       <p:sp>
         <p:nvSpPr>
@@ -24703,6 +25408,10 @@
           </a:solidFill>
           <a:ln/>
         </p:spPr>
+        <p:txBody>
+          <a:bodyPr/>
+          <a:p/>
+        </p:txBody>
       </p:sp>
       <p:sp>
         <p:nvSpPr>
@@ -24905,6 +25614,10 @@
             </a:outerShdw>
           </a:effectLst>
         </p:spPr>
+        <p:txBody>
+          <a:bodyPr/>
+          <a:p/>
+        </p:txBody>
       </p:sp>
       <p:sp>
         <p:nvSpPr>
@@ -24966,6 +25679,10 @@
           </a:solidFill>
           <a:ln/>
         </p:spPr>
+        <p:txBody>
+          <a:bodyPr/>
+          <a:p/>
+        </p:txBody>
       </p:sp>
       <p:sp>
         <p:nvSpPr>
@@ -25168,6 +25885,10 @@
             </a:outerShdw>
           </a:effectLst>
         </p:spPr>
+        <p:txBody>
+          <a:bodyPr/>
+          <a:p/>
+        </p:txBody>
       </p:sp>
       <p:sp>
         <p:nvSpPr>
@@ -25229,6 +25950,10 @@
           </a:solidFill>
           <a:ln/>
         </p:spPr>
+        <p:txBody>
+          <a:bodyPr/>
+          <a:p/>
+        </p:txBody>
       </p:sp>
       <p:sp>
         <p:nvSpPr>
@@ -25493,6 +26218,10 @@
           </a:solidFill>
           <a:ln/>
         </p:spPr>
+        <p:txBody>
+          <a:bodyPr/>
+          <a:p/>
+        </p:txBody>
       </p:sp>
       <p:sp>
         <p:nvSpPr>
@@ -25644,7 +26373,7 @@
                 <a:ea typeface="微软雅黑" pitchFamily="34" charset="-122"/>
                 <a:cs typeface="微软雅黑" pitchFamily="34" charset="-120"/>
               </a:rPr>
-              <a:t>帮扶管理信息系统 v1.11.2</a:t>
+              <a:t>帮扶管理信息系统 v1.11.6</a:t>
             </a:r>
             <a:endParaRPr lang="en-US" sz="1050" dirty="0"/>
           </a:p>
@@ -25678,6 +26407,10 @@
             </a:outerShdw>
           </a:effectLst>
         </p:spPr>
+        <p:txBody>
+          <a:bodyPr/>
+          <a:p/>
+        </p:txBody>
       </p:sp>
       <p:sp>
         <p:nvSpPr>
@@ -25873,6 +26606,10 @@
             </a:outerShdw>
           </a:effectLst>
         </p:spPr>
+        <p:txBody>
+          <a:bodyPr/>
+          <a:p/>
+        </p:txBody>
       </p:sp>
       <p:sp>
         <p:nvSpPr>
@@ -26091,6 +26828,10 @@
           </a:solidFill>
           <a:ln/>
         </p:spPr>
+        <p:txBody>
+          <a:bodyPr/>
+          <a:p/>
+        </p:txBody>
       </p:sp>
       <p:sp>
         <p:nvSpPr>
@@ -26242,7 +26983,7 @@
                 <a:ea typeface="微软雅黑" pitchFamily="34" charset="-122"/>
                 <a:cs typeface="微软雅黑" pitchFamily="34" charset="-120"/>
               </a:rPr>
-              <a:t>帮扶管理信息系统 v1.11.2</a:t>
+              <a:t>帮扶管理信息系统 v1.11.6</a:t>
             </a:r>
             <a:endParaRPr lang="en-US" sz="1050" dirty="0"/>
           </a:p>
@@ -26270,6 +27011,10 @@
             <a:prstDash val="solid"/>
           </a:ln>
         </p:spPr>
+        <p:txBody>
+          <a:bodyPr/>
+          <a:p/>
+        </p:txBody>
       </p:sp>
       <p:sp>
         <p:nvSpPr>
@@ -26290,6 +27035,10 @@
           </a:solidFill>
           <a:ln/>
         </p:spPr>
+        <p:txBody>
+          <a:bodyPr/>
+          <a:p/>
+        </p:txBody>
       </p:sp>
       <p:sp>
         <p:nvSpPr>
@@ -26427,6 +27176,10 @@
           </a:solidFill>
           <a:ln/>
         </p:spPr>
+        <p:txBody>
+          <a:bodyPr/>
+          <a:p/>
+        </p:txBody>
       </p:sp>
       <p:sp>
         <p:nvSpPr>
@@ -26564,6 +27317,10 @@
           </a:solidFill>
           <a:ln/>
         </p:spPr>
+        <p:txBody>
+          <a:bodyPr/>
+          <a:p/>
+        </p:txBody>
       </p:sp>
       <p:sp>
         <p:nvSpPr>
@@ -26701,6 +27458,10 @@
           </a:solidFill>
           <a:ln/>
         </p:spPr>
+        <p:txBody>
+          <a:bodyPr/>
+          <a:p/>
+        </p:txBody>
       </p:sp>
       <p:sp>
         <p:nvSpPr>
@@ -26838,6 +27599,10 @@
           </a:solidFill>
           <a:ln/>
         </p:spPr>
+        <p:txBody>
+          <a:bodyPr/>
+          <a:p/>
+        </p:txBody>
       </p:sp>
       <p:sp>
         <p:nvSpPr>
@@ -26872,7 +27637,7 @@
                 <a:ea typeface="微软雅黑" pitchFamily="34" charset="-122"/>
                 <a:cs typeface="微软雅黑" pitchFamily="34" charset="-120"/>
               </a:rPr>
-              <a:t>v1.11.2</a:t>
+              <a:t>v1.11.6</a:t>
             </a:r>
             <a:endParaRPr lang="en-US" sz="1500" dirty="0"/>
           </a:p>
@@ -26984,6 +27749,10 @@
             </a:outerShdw>
           </a:effectLst>
         </p:spPr>
+        <p:txBody>
+          <a:bodyPr/>
+          <a:p/>
+        </p:txBody>
       </p:sp>
       <p:sp>
         <p:nvSpPr>
@@ -27075,6 +27844,10 @@
           </a:solidFill>
           <a:ln/>
         </p:spPr>
+        <p:txBody>
+          <a:bodyPr/>
+          <a:p/>
+        </p:txBody>
       </p:sp>
       <p:sp>
         <p:nvSpPr>
@@ -27226,7 +27999,7 @@
                 <a:ea typeface="微软雅黑" pitchFamily="34" charset="-122"/>
                 <a:cs typeface="微软雅黑" pitchFamily="34" charset="-120"/>
               </a:rPr>
-              <a:t>帮扶管理信息系统 v1.11.2</a:t>
+              <a:t>帮扶管理信息系统 v1.11.6</a:t>
             </a:r>
             <a:endParaRPr lang="en-US" sz="1050" dirty="0"/>
           </a:p>
@@ -27260,6 +28033,10 @@
             </a:outerShdw>
           </a:effectLst>
         </p:spPr>
+        <p:txBody>
+          <a:bodyPr/>
+          <a:p/>
+        </p:txBody>
       </p:sp>
       <p:sp>
         <p:nvSpPr>
@@ -27367,6 +28144,10 @@
             </a:outerShdw>
           </a:effectLst>
         </p:spPr>
+        <p:txBody>
+          <a:bodyPr/>
+          <a:p/>
+        </p:txBody>
       </p:sp>
       <p:sp>
         <p:nvSpPr>
@@ -27474,6 +28255,10 @@
             </a:outerShdw>
           </a:effectLst>
         </p:spPr>
+        <p:txBody>
+          <a:bodyPr/>
+          <a:p/>
+        </p:txBody>
       </p:sp>
       <p:sp>
         <p:nvSpPr>
@@ -27581,6 +28366,10 @@
             </a:outerShdw>
           </a:effectLst>
         </p:spPr>
+        <p:txBody>
+          <a:bodyPr/>
+          <a:p/>
+        </p:txBody>
       </p:sp>
       <p:sp>
         <p:nvSpPr>
@@ -27688,6 +28477,10 @@
             </a:outerShdw>
           </a:effectLst>
         </p:spPr>
+        <p:txBody>
+          <a:bodyPr/>
+          <a:p/>
+        </p:txBody>
       </p:sp>
       <p:sp>
         <p:nvSpPr>
@@ -27795,6 +28588,10 @@
             </a:outerShdw>
           </a:effectLst>
         </p:spPr>
+        <p:txBody>
+          <a:bodyPr/>
+          <a:p/>
+        </p:txBody>
       </p:sp>
       <p:sp>
         <p:nvSpPr>
@@ -27925,6 +28722,10 @@
           </a:solidFill>
           <a:ln/>
         </p:spPr>
+        <p:txBody>
+          <a:bodyPr/>
+          <a:p/>
+        </p:txBody>
       </p:sp>
       <p:sp>
         <p:nvSpPr>
@@ -28076,7 +28877,7 @@
                 <a:ea typeface="微软雅黑" pitchFamily="34" charset="-122"/>
                 <a:cs typeface="微软雅黑" pitchFamily="34" charset="-120"/>
               </a:rPr>
-              <a:t>帮扶管理信息系统 v1.11.2</a:t>
+              <a:t>帮扶管理信息系统 v1.11.6</a:t>
             </a:r>
             <a:endParaRPr lang="en-US" sz="1050" dirty="0"/>
           </a:p>
@@ -28140,6 +28941,10 @@
           </a:solidFill>
           <a:ln/>
         </p:spPr>
+        <p:txBody>
+          <a:bodyPr/>
+          <a:p/>
+        </p:txBody>
       </p:sp>
       <p:sp>
         <p:nvSpPr>
@@ -28238,6 +29043,10 @@
           </a:solidFill>
           <a:ln/>
         </p:spPr>
+        <p:txBody>
+          <a:bodyPr/>
+          <a:p/>
+        </p:txBody>
       </p:sp>
       <p:sp>
         <p:nvSpPr>
@@ -28336,6 +29145,10 @@
           </a:solidFill>
           <a:ln/>
         </p:spPr>
+        <p:txBody>
+          <a:bodyPr/>
+          <a:p/>
+        </p:txBody>
       </p:sp>
       <p:sp>
         <p:nvSpPr>
@@ -28466,6 +29279,10 @@
           </a:solidFill>
           <a:ln/>
         </p:spPr>
+        <p:txBody>
+          <a:bodyPr/>
+          <a:p/>
+        </p:txBody>
       </p:sp>
       <p:sp>
         <p:nvSpPr>
@@ -28486,6 +29303,10 @@
           </a:solidFill>
           <a:ln/>
         </p:spPr>
+        <p:txBody>
+          <a:bodyPr/>
+          <a:p/>
+        </p:txBody>
       </p:sp>
       <p:sp>
         <p:nvSpPr>
@@ -28598,7 +29419,7 @@
                 <a:ea typeface="微软雅黑" pitchFamily="34" charset="-122"/>
                 <a:cs typeface="微软雅黑" pitchFamily="34" charset="-120"/>
               </a:rPr>
-              <a:t>帮扶管理信息系统 v1.11.2  ·  仓库：github.com/lzh745200/MRRS  ·  完整文档见 docs/ 目录</a:t>
+              <a:t>帮扶管理信息系统 v1.11.6  ·  仓库：github.com/lzh745200/MRRS  ·  完整文档见 docs/ 目录</a:t>
             </a:r>
             <a:endParaRPr lang="en-US" sz="1350" dirty="0"/>
           </a:p>
@@ -28637,7 +29458,7 @@
                 <a:ea typeface="微软雅黑" pitchFamily="34" charset="-122"/>
                 <a:cs typeface="微软雅黑" pitchFamily="34" charset="-120"/>
               </a:rPr>
-              <a:t>10,142 后端用例 + 5,691 前端用例 全绿守护 · Windows / 麒麟双平台离线交付</a:t>
+              <a:t>10,692 后端用例 + 5,691 前端用例 全绿守护 · Windows / 麒麟双平台离线交付</a:t>
             </a:r>
             <a:endParaRPr lang="en-US" sz="1350" dirty="0"/>
           </a:p>
@@ -28694,6 +29515,10 @@
           </a:solidFill>
           <a:ln/>
         </p:spPr>
+        <p:txBody>
+          <a:bodyPr/>
+          <a:p/>
+        </p:txBody>
       </p:sp>
       <p:sp>
         <p:nvSpPr>
@@ -28845,7 +29670,7 @@
                 <a:ea typeface="微软雅黑" pitchFamily="34" charset="-122"/>
                 <a:cs typeface="微软雅黑" pitchFamily="34" charset="-120"/>
               </a:rPr>
-              <a:t>帮扶管理信息系统 v1.11.2</a:t>
+              <a:t>帮扶管理信息系统 v1.11.6</a:t>
             </a:r>
             <a:endParaRPr lang="en-US" sz="1050" dirty="0"/>
           </a:p>
@@ -28879,6 +29704,10 @@
             </a:outerShdw>
           </a:effectLst>
         </p:spPr>
+        <p:txBody>
+          <a:bodyPr/>
+          <a:p/>
+        </p:txBody>
       </p:sp>
       <p:sp>
         <p:nvSpPr>
@@ -28899,6 +29728,10 @@
           </a:solidFill>
           <a:ln/>
         </p:spPr>
+        <p:txBody>
+          <a:bodyPr/>
+          <a:p/>
+        </p:txBody>
       </p:sp>
       <p:sp>
         <p:nvSpPr>
@@ -29006,6 +29839,10 @@
             </a:outerShdw>
           </a:effectLst>
         </p:spPr>
+        <p:txBody>
+          <a:bodyPr/>
+          <a:p/>
+        </p:txBody>
       </p:sp>
       <p:sp>
         <p:nvSpPr>
@@ -29026,6 +29863,10 @@
           </a:solidFill>
           <a:ln/>
         </p:spPr>
+        <p:txBody>
+          <a:bodyPr/>
+          <a:p/>
+        </p:txBody>
       </p:sp>
       <p:sp>
         <p:nvSpPr>
@@ -29133,6 +29974,10 @@
             </a:outerShdw>
           </a:effectLst>
         </p:spPr>
+        <p:txBody>
+          <a:bodyPr/>
+          <a:p/>
+        </p:txBody>
       </p:sp>
       <p:sp>
         <p:nvSpPr>
@@ -29153,6 +29998,10 @@
           </a:solidFill>
           <a:ln/>
         </p:spPr>
+        <p:txBody>
+          <a:bodyPr/>
+          <a:p/>
+        </p:txBody>
       </p:sp>
       <p:sp>
         <p:nvSpPr>
@@ -29260,6 +30109,10 @@
             </a:outerShdw>
           </a:effectLst>
         </p:spPr>
+        <p:txBody>
+          <a:bodyPr/>
+          <a:p/>
+        </p:txBody>
       </p:sp>
       <p:sp>
         <p:nvSpPr>
@@ -29280,6 +30133,10 @@
           </a:solidFill>
           <a:ln/>
         </p:spPr>
+        <p:txBody>
+          <a:bodyPr/>
+          <a:p/>
+        </p:txBody>
       </p:sp>
       <p:sp>
         <p:nvSpPr>
@@ -29410,6 +30267,10 @@
           </a:solidFill>
           <a:ln/>
         </p:spPr>
+        <p:txBody>
+          <a:bodyPr/>
+          <a:p/>
+        </p:txBody>
       </p:sp>
       <p:sp>
         <p:nvSpPr>
@@ -29561,7 +30422,7 @@
                 <a:ea typeface="微软雅黑" pitchFamily="34" charset="-122"/>
                 <a:cs typeface="微软雅黑" pitchFamily="34" charset="-120"/>
               </a:rPr>
-              <a:t>帮扶管理信息系统 v1.11.2</a:t>
+              <a:t>帮扶管理信息系统 v1.11.6</a:t>
             </a:r>
             <a:endParaRPr lang="en-US" sz="1050" dirty="0"/>
           </a:p>
@@ -29901,6 +30762,10 @@
             <a:prstDash val="solid"/>
           </a:ln>
         </p:spPr>
+        <p:txBody>
+          <a:bodyPr/>
+          <a:p/>
+        </p:txBody>
       </p:sp>
       <p:sp>
         <p:nvSpPr>
@@ -30247,7 +31112,7 @@
                 <a:ea typeface="微软雅黑" pitchFamily="34" charset="-122"/>
                 <a:cs typeface="微软雅黑" pitchFamily="34" charset="-120"/>
               </a:rPr>
-              <a:t>数据来源：仓库实测（2026-08-30，v1.11.2）—— flake8 0 错误 · bandit 0 中高危 · vue-tsc 0 错误 · eslint 0 警告</a:t>
+              <a:t>数据来源：仓库实测（2026-08-30，v1.11.6）—— flake8 0 错误 · bandit 0 中高危 · vue-tsc 0 错误 · eslint 0 警告</a:t>
             </a:r>
             <a:endParaRPr lang="en-US" sz="1200" dirty="0"/>
           </a:p>
@@ -30598,6 +31463,10 @@
           </a:solidFill>
           <a:ln/>
         </p:spPr>
+        <p:txBody>
+          <a:bodyPr/>
+          <a:p/>
+        </p:txBody>
       </p:sp>
       <p:sp>
         <p:nvSpPr>
@@ -30749,7 +31618,7 @@
                 <a:ea typeface="微软雅黑" pitchFamily="34" charset="-122"/>
                 <a:cs typeface="微软雅黑" pitchFamily="34" charset="-120"/>
               </a:rPr>
-              <a:t>帮扶管理信息系统 v1.11.2</a:t>
+              <a:t>帮扶管理信息系统 v1.11.6</a:t>
             </a:r>
             <a:endParaRPr lang="en-US" sz="1050" dirty="0"/>
           </a:p>
@@ -30783,6 +31652,10 @@
             </a:outerShdw>
           </a:effectLst>
         </p:spPr>
+        <p:txBody>
+          <a:bodyPr/>
+          <a:p/>
+        </p:txBody>
       </p:sp>
       <p:sp>
         <p:nvSpPr>
@@ -30996,6 +31869,10 @@
             </a:outerShdw>
           </a:effectLst>
         </p:spPr>
+        <p:txBody>
+          <a:bodyPr/>
+          <a:p/>
+        </p:txBody>
       </p:sp>
       <p:sp>
         <p:nvSpPr>
@@ -31209,6 +32086,10 @@
             </a:outerShdw>
           </a:effectLst>
         </p:spPr>
+        <p:txBody>
+          <a:bodyPr/>
+          <a:p/>
+        </p:txBody>
       </p:sp>
       <p:sp>
         <p:nvSpPr>
@@ -31422,6 +32303,10 @@
             </a:outerShdw>
           </a:effectLst>
         </p:spPr>
+        <p:txBody>
+          <a:bodyPr/>
+          <a:p/>
+        </p:txBody>
       </p:sp>
       <p:sp>
         <p:nvSpPr>
@@ -31658,6 +32543,10 @@
           </a:solidFill>
           <a:ln/>
         </p:spPr>
+        <p:txBody>
+          <a:bodyPr/>
+          <a:p/>
+        </p:txBody>
       </p:sp>
       <p:sp>
         <p:nvSpPr>
@@ -31809,7 +32698,7 @@
                 <a:ea typeface="微软雅黑" pitchFamily="34" charset="-122"/>
                 <a:cs typeface="微软雅黑" pitchFamily="34" charset="-120"/>
               </a:rPr>
-              <a:t>帮扶管理信息系统 v1.11.2</a:t>
+              <a:t>帮扶管理信息系统 v1.11.6</a:t>
             </a:r>
             <a:endParaRPr lang="en-US" sz="1050" dirty="0"/>
           </a:p>
@@ -31836,6 +32725,10 @@
           </a:solidFill>
           <a:ln/>
         </p:spPr>
+        <p:txBody>
+          <a:bodyPr/>
+          <a:p/>
+        </p:txBody>
       </p:sp>
       <p:sp>
         <p:nvSpPr>
@@ -31938,6 +32831,10 @@
             <a:tailEnd type="triangle"/>
           </a:ln>
         </p:spPr>
+        <p:txBody>
+          <a:bodyPr/>
+          <a:p/>
+        </p:txBody>
       </p:sp>
       <p:sp>
         <p:nvSpPr>
@@ -31960,6 +32857,10 @@
           </a:solidFill>
           <a:ln/>
         </p:spPr>
+        <p:txBody>
+          <a:bodyPr/>
+          <a:p/>
+        </p:txBody>
       </p:sp>
       <p:sp>
         <p:nvSpPr>
@@ -32062,6 +32963,10 @@
             <a:tailEnd type="triangle"/>
           </a:ln>
         </p:spPr>
+        <p:txBody>
+          <a:bodyPr/>
+          <a:p/>
+        </p:txBody>
       </p:sp>
       <p:sp>
         <p:nvSpPr>
@@ -32084,6 +32989,10 @@
           </a:solidFill>
           <a:ln/>
         </p:spPr>
+        <p:txBody>
+          <a:bodyPr/>
+          <a:p/>
+        </p:txBody>
       </p:sp>
       <p:sp>
         <p:nvSpPr>
@@ -32186,6 +33095,10 @@
             <a:tailEnd type="triangle"/>
           </a:ln>
         </p:spPr>
+        <p:txBody>
+          <a:bodyPr/>
+          <a:p/>
+        </p:txBody>
       </p:sp>
       <p:sp>
         <p:nvSpPr>
@@ -32208,6 +33121,10 @@
           </a:solidFill>
           <a:ln/>
         </p:spPr>
+        <p:txBody>
+          <a:bodyPr/>
+          <a:p/>
+        </p:txBody>
       </p:sp>
       <p:sp>
         <p:nvSpPr>

--- a/docs/帮扶管理信息系统介绍.pptx
+++ b/docs/帮扶管理信息系统介绍.pptx
@@ -5089,7 +5089,7 @@
                 <a:ea typeface="微软雅黑" pitchFamily="34" charset="-122"/>
                 <a:cs typeface="微软雅黑" pitchFamily="34" charset="-120"/>
               </a:rPr>
-              <a:t>帮扶管理信息系统 v1.11.6</a:t>
+              <a:t>帮扶管理信息系统 v1.11.7</a:t>
             </a:r>
             <a:endParaRPr lang="en-US" sz="1050" dirty="0"/>
           </a:p>
@@ -5699,7 +5699,7 @@
                 <a:ea typeface="微软雅黑" pitchFamily="34" charset="-122"/>
                 <a:cs typeface="微软雅黑" pitchFamily="34" charset="-120"/>
               </a:rPr>
-              <a:t>帮扶管理信息系统 v1.11.6</a:t>
+              <a:t>帮扶管理信息系统 v1.11.7</a:t>
             </a:r>
             <a:endParaRPr lang="en-US" sz="1050" dirty="0"/>
           </a:p>
@@ -6599,7 +6599,7 @@
                 <a:ea typeface="微软雅黑" pitchFamily="34" charset="-122"/>
                 <a:cs typeface="微软雅黑" pitchFamily="34" charset="-120"/>
               </a:rPr>
-              <a:t>帮扶管理信息系统 v1.11.6</a:t>
+              <a:t>帮扶管理信息系统 v1.11.7</a:t>
             </a:r>
             <a:endParaRPr lang="en-US" sz="1050" dirty="0"/>
           </a:p>
@@ -7209,7 +7209,7 @@
                 <a:ea typeface="微软雅黑" pitchFamily="34" charset="-122"/>
                 <a:cs typeface="微软雅黑" pitchFamily="34" charset="-120"/>
               </a:rPr>
-              <a:t>帮扶管理信息系统 v1.11.6</a:t>
+              <a:t>帮扶管理信息系统 v1.11.7</a:t>
             </a:r>
             <a:endParaRPr lang="en-US" sz="1050" dirty="0"/>
           </a:p>
@@ -8598,7 +8598,7 @@
                 <a:ea typeface="微软雅黑" pitchFamily="34" charset="-122"/>
                 <a:cs typeface="微软雅黑" pitchFamily="34" charset="-120"/>
               </a:rPr>
-              <a:t>帮扶管理信息系统 v1.11.6</a:t>
+              <a:t>帮扶管理信息系统 v1.11.7</a:t>
             </a:r>
             <a:endParaRPr lang="en-US" sz="1050" dirty="0"/>
           </a:p>
@@ -9749,7 +9749,7 @@
                 <a:ea typeface="微软雅黑" pitchFamily="34" charset="-122"/>
                 <a:cs typeface="微软雅黑" pitchFamily="34" charset="-120"/>
               </a:rPr>
-              <a:t>帮扶管理信息系统 v1.11.6</a:t>
+              <a:t>帮扶管理信息系统 v1.11.7</a:t>
             </a:r>
             <a:endParaRPr lang="en-US" sz="1050" dirty="0"/>
           </a:p>
@@ -10359,7 +10359,7 @@
                 <a:ea typeface="微软雅黑" pitchFamily="34" charset="-122"/>
                 <a:cs typeface="微软雅黑" pitchFamily="34" charset="-120"/>
               </a:rPr>
-              <a:t>帮扶管理信息系统 v1.11.6</a:t>
+              <a:t>帮扶管理信息系统 v1.11.7</a:t>
             </a:r>
             <a:endParaRPr lang="en-US" sz="1050" dirty="0"/>
           </a:p>
@@ -11197,7 +11197,7 @@
                 <a:ea typeface="微软雅黑" pitchFamily="34" charset="-122"/>
                 <a:cs typeface="微软雅黑" pitchFamily="34" charset="-120"/>
               </a:rPr>
-              <a:t>帮扶管理信息系统 v1.11.6</a:t>
+              <a:t>帮扶管理信息系统 v1.11.7</a:t>
             </a:r>
             <a:endParaRPr lang="en-US" sz="1050" dirty="0"/>
           </a:p>
@@ -11914,7 +11914,7 @@
                 <a:ea typeface="微软雅黑" pitchFamily="34" charset="-122"/>
                 <a:cs typeface="微软雅黑" pitchFamily="34" charset="-120"/>
               </a:rPr>
-              <a:t>帮扶管理信息系统 v1.11.6</a:t>
+              <a:t>帮扶管理信息系统 v1.11.7</a:t>
             </a:r>
             <a:endParaRPr lang="en-US" sz="1050" dirty="0"/>
           </a:p>
@@ -14420,7 +14420,7 @@
                 <a:ea typeface="微软雅黑" pitchFamily="34" charset="-122"/>
                 <a:cs typeface="微软雅黑" pitchFamily="34" charset="-120"/>
               </a:rPr>
-              <a:t>帮扶管理信息系统 v1.11.6</a:t>
+              <a:t>帮扶管理信息系统 v1.11.7</a:t>
             </a:r>
             <a:endParaRPr lang="en-US" sz="1050" dirty="0"/>
           </a:p>
@@ -15030,7 +15030,7 @@
                 <a:ea typeface="微软雅黑" pitchFamily="34" charset="-122"/>
                 <a:cs typeface="微软雅黑" pitchFamily="34" charset="-120"/>
               </a:rPr>
-              <a:t>帮扶管理信息系统 v1.11.6</a:t>
+              <a:t>帮扶管理信息系统 v1.11.7</a:t>
             </a:r>
             <a:endParaRPr lang="en-US" sz="1050" dirty="0"/>
           </a:p>
@@ -15684,7 +15684,7 @@
                 <a:ea typeface="微软雅黑" pitchFamily="34" charset="-122"/>
                 <a:cs typeface="微软雅黑" pitchFamily="34" charset="-120"/>
               </a:rPr>
-              <a:t>帮扶管理信息系统 v1.11.6</a:t>
+              <a:t>帮扶管理信息系统 v1.11.7</a:t>
             </a:r>
             <a:endParaRPr lang="en-US" sz="1050" dirty="0"/>
           </a:p>
@@ -16363,7 +16363,7 @@
                 <a:ea typeface="微软雅黑" pitchFamily="34" charset="-122"/>
                 <a:cs typeface="微软雅黑" pitchFamily="34" charset="-120"/>
               </a:rPr>
-              <a:t>帮扶管理信息系统 v1.11.6</a:t>
+              <a:t>帮扶管理信息系统 v1.11.7</a:t>
             </a:r>
             <a:endParaRPr lang="en-US" sz="1050" dirty="0"/>
           </a:p>
@@ -17241,7 +17241,7 @@
                 <a:ea typeface="微软雅黑" pitchFamily="34" charset="-122"/>
                 <a:cs typeface="微软雅黑" pitchFamily="34" charset="-120"/>
               </a:rPr>
-              <a:t>帮扶管理信息系统 v1.11.6</a:t>
+              <a:t>帮扶管理信息系统 v1.11.7</a:t>
             </a:r>
             <a:endParaRPr lang="en-US" sz="1050" dirty="0"/>
           </a:p>
@@ -18413,7 +18413,7 @@
                 <a:ea typeface="微软雅黑" pitchFamily="34" charset="-122"/>
                 <a:cs typeface="微软雅黑" pitchFamily="34" charset="-120"/>
               </a:rPr>
-              <a:t>帮扶管理信息系统 v1.11.6</a:t>
+              <a:t>帮扶管理信息系统 v1.11.7</a:t>
             </a:r>
             <a:endParaRPr lang="en-US" sz="1050" dirty="0"/>
           </a:p>
@@ -19414,7 +19414,7 @@
                 <a:ea typeface="微软雅黑" pitchFamily="34" charset="-122"/>
                 <a:cs typeface="微软雅黑" pitchFamily="34" charset="-120"/>
               </a:rPr>
-              <a:t>帮扶管理信息系统 v1.11.6</a:t>
+              <a:t>帮扶管理信息系统 v1.11.7</a:t>
             </a:r>
             <a:endParaRPr lang="en-US" sz="1050" dirty="0"/>
           </a:p>
@@ -20233,7 +20233,7 @@
                 <a:ea typeface="微软雅黑" pitchFamily="34" charset="-122"/>
                 <a:cs typeface="微软雅黑" pitchFamily="34" charset="-120"/>
               </a:rPr>
-              <a:t>帮扶管理信息系统 v1.11.6</a:t>
+              <a:t>帮扶管理信息系统 v1.11.7</a:t>
             </a:r>
             <a:endParaRPr lang="en-US" sz="1050" dirty="0"/>
           </a:p>
@@ -21121,7 +21121,7 @@
                 <a:ea typeface="微软雅黑" pitchFamily="34" charset="-122"/>
                 <a:cs typeface="微软雅黑" pitchFamily="34" charset="-120"/>
               </a:rPr>
-              <a:t>帮扶管理信息系统 v1.11.6</a:t>
+              <a:t>帮扶管理信息系统 v1.11.7</a:t>
             </a:r>
             <a:endParaRPr lang="en-US" sz="1050" dirty="0"/>
           </a:p>
@@ -22239,7 +22239,7 @@
                 <a:ea typeface="微软雅黑" pitchFamily="34" charset="-122"/>
                 <a:cs typeface="微软雅黑" pitchFamily="34" charset="-120"/>
               </a:rPr>
-              <a:t>帮扶管理信息系统 v1.11.6</a:t>
+              <a:t>帮扶管理信息系统 v1.11.7</a:t>
             </a:r>
             <a:endParaRPr lang="en-US" sz="1050" dirty="0"/>
           </a:p>
@@ -23187,7 +23187,7 @@
                 <a:ea typeface="微软雅黑" pitchFamily="34" charset="-122"/>
                 <a:cs typeface="微软雅黑" pitchFamily="34" charset="-120"/>
               </a:rPr>
-              <a:t>帮扶管理信息系统 v1.11.6</a:t>
+              <a:t>帮扶管理信息系统 v1.11.7</a:t>
             </a:r>
             <a:endParaRPr lang="en-US" sz="1050" dirty="0"/>
           </a:p>
@@ -23242,7 +23242,7 @@
                 <a:ea typeface="微软雅黑" pitchFamily="34" charset="-122"/>
                 <a:cs typeface="微软雅黑" pitchFamily="34" charset="-120"/>
               </a:rPr>
-              <a:t>数据来源：v1.11.6 全量本地实测（2026-08-30）</a:t>
+              <a:t>数据来源：v1.11.7 全量本地实测（2026-08-30）</a:t>
             </a:r>
             <a:endParaRPr lang="en-US" sz="1100" dirty="0"/>
           </a:p>
@@ -23738,7 +23738,7 @@
                 <a:ea typeface="微软雅黑" pitchFamily="34" charset="-122"/>
                 <a:cs typeface="微软雅黑" pitchFamily="34" charset="-120"/>
               </a:rPr>
-              <a:t>帮扶管理信息系统 v1.11.6</a:t>
+              <a:t>帮扶管理信息系统 v1.11.7</a:t>
             </a:r>
             <a:endParaRPr lang="en-US" sz="1050" dirty="0"/>
           </a:p>
@@ -24405,7 +24405,7 @@
                 <a:ea typeface="微软雅黑" pitchFamily="34" charset="-122"/>
                 <a:cs typeface="微软雅黑" pitchFamily="34" charset="-120"/>
               </a:rPr>
-              <a:t>帮扶管理信息系统 v1.11.6</a:t>
+              <a:t>帮扶管理信息系统 v1.11.7</a:t>
             </a:r>
             <a:endParaRPr lang="en-US" sz="1050" dirty="0"/>
           </a:p>
@@ -25309,7 +25309,7 @@
                 <a:ea typeface="微软雅黑" pitchFamily="34" charset="-122"/>
                 <a:cs typeface="微软雅黑" pitchFamily="34" charset="-120"/>
               </a:rPr>
-              <a:t>帮扶管理信息系统 v1.11.6</a:t>
+              <a:t>帮扶管理信息系统 v1.11.7</a:t>
             </a:r>
             <a:endParaRPr lang="en-US" sz="1050" dirty="0"/>
           </a:p>
@@ -26373,7 +26373,7 @@
                 <a:ea typeface="微软雅黑" pitchFamily="34" charset="-122"/>
                 <a:cs typeface="微软雅黑" pitchFamily="34" charset="-120"/>
               </a:rPr>
-              <a:t>帮扶管理信息系统 v1.11.6</a:t>
+              <a:t>帮扶管理信息系统 v1.11.7</a:t>
             </a:r>
             <a:endParaRPr lang="en-US" sz="1050" dirty="0"/>
           </a:p>
@@ -26983,7 +26983,7 @@
                 <a:ea typeface="微软雅黑" pitchFamily="34" charset="-122"/>
                 <a:cs typeface="微软雅黑" pitchFamily="34" charset="-120"/>
               </a:rPr>
-              <a:t>帮扶管理信息系统 v1.11.6</a:t>
+              <a:t>帮扶管理信息系统 v1.11.7</a:t>
             </a:r>
             <a:endParaRPr lang="en-US" sz="1050" dirty="0"/>
           </a:p>
@@ -27637,7 +27637,7 @@
                 <a:ea typeface="微软雅黑" pitchFamily="34" charset="-122"/>
                 <a:cs typeface="微软雅黑" pitchFamily="34" charset="-120"/>
               </a:rPr>
-              <a:t>v1.11.6</a:t>
+              <a:t>v1.11.7</a:t>
             </a:r>
             <a:endParaRPr lang="en-US" sz="1500" dirty="0"/>
           </a:p>
@@ -27999,7 +27999,7 @@
                 <a:ea typeface="微软雅黑" pitchFamily="34" charset="-122"/>
                 <a:cs typeface="微软雅黑" pitchFamily="34" charset="-120"/>
               </a:rPr>
-              <a:t>帮扶管理信息系统 v1.11.6</a:t>
+              <a:t>帮扶管理信息系统 v1.11.7</a:t>
             </a:r>
             <a:endParaRPr lang="en-US" sz="1050" dirty="0"/>
           </a:p>
@@ -28877,7 +28877,7 @@
                 <a:ea typeface="微软雅黑" pitchFamily="34" charset="-122"/>
                 <a:cs typeface="微软雅黑" pitchFamily="34" charset="-120"/>
               </a:rPr>
-              <a:t>帮扶管理信息系统 v1.11.6</a:t>
+              <a:t>帮扶管理信息系统 v1.11.7</a:t>
             </a:r>
             <a:endParaRPr lang="en-US" sz="1050" dirty="0"/>
           </a:p>
@@ -29419,7 +29419,7 @@
                 <a:ea typeface="微软雅黑" pitchFamily="34" charset="-122"/>
                 <a:cs typeface="微软雅黑" pitchFamily="34" charset="-120"/>
               </a:rPr>
-              <a:t>帮扶管理信息系统 v1.11.6  ·  仓库：github.com/lzh745200/MRRS  ·  完整文档见 docs/ 目录</a:t>
+              <a:t>帮扶管理信息系统 v1.11.7  ·  仓库：github.com/lzh745200/MRRS  ·  完整文档见 docs/ 目录</a:t>
             </a:r>
             <a:endParaRPr lang="en-US" sz="1350" dirty="0"/>
           </a:p>
@@ -29670,7 +29670,7 @@
                 <a:ea typeface="微软雅黑" pitchFamily="34" charset="-122"/>
                 <a:cs typeface="微软雅黑" pitchFamily="34" charset="-120"/>
               </a:rPr>
-              <a:t>帮扶管理信息系统 v1.11.6</a:t>
+              <a:t>帮扶管理信息系统 v1.11.7</a:t>
             </a:r>
             <a:endParaRPr lang="en-US" sz="1050" dirty="0"/>
           </a:p>
@@ -30422,7 +30422,7 @@
                 <a:ea typeface="微软雅黑" pitchFamily="34" charset="-122"/>
                 <a:cs typeface="微软雅黑" pitchFamily="34" charset="-120"/>
               </a:rPr>
-              <a:t>帮扶管理信息系统 v1.11.6</a:t>
+              <a:t>帮扶管理信息系统 v1.11.7</a:t>
             </a:r>
             <a:endParaRPr lang="en-US" sz="1050" dirty="0"/>
           </a:p>
@@ -31112,7 +31112,7 @@
                 <a:ea typeface="微软雅黑" pitchFamily="34" charset="-122"/>
                 <a:cs typeface="微软雅黑" pitchFamily="34" charset="-120"/>
               </a:rPr>
-              <a:t>数据来源：仓库实测（2026-08-30，v1.11.6）—— flake8 0 错误 · bandit 0 中高危 · vue-tsc 0 错误 · eslint 0 警告</a:t>
+              <a:t>数据来源：仓库实测（2026-08-30，v1.11.7）—— flake8 0 错误 · bandit 0 中高危 · vue-tsc 0 错误 · eslint 0 警告</a:t>
             </a:r>
             <a:endParaRPr lang="en-US" sz="1200" dirty="0"/>
           </a:p>
@@ -31618,7 +31618,7 @@
                 <a:ea typeface="微软雅黑" pitchFamily="34" charset="-122"/>
                 <a:cs typeface="微软雅黑" pitchFamily="34" charset="-120"/>
               </a:rPr>
-              <a:t>帮扶管理信息系统 v1.11.6</a:t>
+              <a:t>帮扶管理信息系统 v1.11.7</a:t>
             </a:r>
             <a:endParaRPr lang="en-US" sz="1050" dirty="0"/>
           </a:p>
@@ -32698,7 +32698,7 @@
                 <a:ea typeface="微软雅黑" pitchFamily="34" charset="-122"/>
                 <a:cs typeface="微软雅黑" pitchFamily="34" charset="-120"/>
               </a:rPr>
-              <a:t>帮扶管理信息系统 v1.11.6</a:t>
+              <a:t>帮扶管理信息系统 v1.11.7</a:t>
             </a:r>
             <a:endParaRPr lang="en-US" sz="1050" dirty="0"/>
           </a:p>

--- a/docs/帮扶管理信息系统介绍.pptx
+++ b/docs/帮扶管理信息系统介绍.pptx
@@ -5089,7 +5089,7 @@
                 <a:ea typeface="微软雅黑" pitchFamily="34" charset="-122"/>
                 <a:cs typeface="微软雅黑" pitchFamily="34" charset="-120"/>
               </a:rPr>
-              <a:t>帮扶管理信息系统 v1.11.7</a:t>
+              <a:t>帮扶管理信息系统 v1.11.8</a:t>
             </a:r>
             <a:endParaRPr lang="en-US" sz="1050" dirty="0"/>
           </a:p>
@@ -5699,7 +5699,7 @@
                 <a:ea typeface="微软雅黑" pitchFamily="34" charset="-122"/>
                 <a:cs typeface="微软雅黑" pitchFamily="34" charset="-120"/>
               </a:rPr>
-              <a:t>帮扶管理信息系统 v1.11.7</a:t>
+              <a:t>帮扶管理信息系统 v1.11.8</a:t>
             </a:r>
             <a:endParaRPr lang="en-US" sz="1050" dirty="0"/>
           </a:p>
@@ -6599,7 +6599,7 @@
                 <a:ea typeface="微软雅黑" pitchFamily="34" charset="-122"/>
                 <a:cs typeface="微软雅黑" pitchFamily="34" charset="-120"/>
               </a:rPr>
-              <a:t>帮扶管理信息系统 v1.11.7</a:t>
+              <a:t>帮扶管理信息系统 v1.11.8</a:t>
             </a:r>
             <a:endParaRPr lang="en-US" sz="1050" dirty="0"/>
           </a:p>
@@ -7209,7 +7209,7 @@
                 <a:ea typeface="微软雅黑" pitchFamily="34" charset="-122"/>
                 <a:cs typeface="微软雅黑" pitchFamily="34" charset="-120"/>
               </a:rPr>
-              <a:t>帮扶管理信息系统 v1.11.7</a:t>
+              <a:t>帮扶管理信息系统 v1.11.8</a:t>
             </a:r>
             <a:endParaRPr lang="en-US" sz="1050" dirty="0"/>
           </a:p>
@@ -8598,7 +8598,7 @@
                 <a:ea typeface="微软雅黑" pitchFamily="34" charset="-122"/>
                 <a:cs typeface="微软雅黑" pitchFamily="34" charset="-120"/>
               </a:rPr>
-              <a:t>帮扶管理信息系统 v1.11.7</a:t>
+              <a:t>帮扶管理信息系统 v1.11.8</a:t>
             </a:r>
             <a:endParaRPr lang="en-US" sz="1050" dirty="0"/>
           </a:p>
@@ -9749,7 +9749,7 @@
                 <a:ea typeface="微软雅黑" pitchFamily="34" charset="-122"/>
                 <a:cs typeface="微软雅黑" pitchFamily="34" charset="-120"/>
               </a:rPr>
-              <a:t>帮扶管理信息系统 v1.11.7</a:t>
+              <a:t>帮扶管理信息系统 v1.11.8</a:t>
             </a:r>
             <a:endParaRPr lang="en-US" sz="1050" dirty="0"/>
           </a:p>
@@ -10359,7 +10359,7 @@
                 <a:ea typeface="微软雅黑" pitchFamily="34" charset="-122"/>
                 <a:cs typeface="微软雅黑" pitchFamily="34" charset="-120"/>
               </a:rPr>
-              <a:t>帮扶管理信息系统 v1.11.7</a:t>
+              <a:t>帮扶管理信息系统 v1.11.8</a:t>
             </a:r>
             <a:endParaRPr lang="en-US" sz="1050" dirty="0"/>
           </a:p>
@@ -11197,7 +11197,7 @@
                 <a:ea typeface="微软雅黑" pitchFamily="34" charset="-122"/>
                 <a:cs typeface="微软雅黑" pitchFamily="34" charset="-120"/>
               </a:rPr>
-              <a:t>帮扶管理信息系统 v1.11.7</a:t>
+              <a:t>帮扶管理信息系统 v1.11.8</a:t>
             </a:r>
             <a:endParaRPr lang="en-US" sz="1050" dirty="0"/>
           </a:p>
@@ -11914,7 +11914,7 @@
                 <a:ea typeface="微软雅黑" pitchFamily="34" charset="-122"/>
                 <a:cs typeface="微软雅黑" pitchFamily="34" charset="-120"/>
               </a:rPr>
-              <a:t>帮扶管理信息系统 v1.11.7</a:t>
+              <a:t>帮扶管理信息系统 v1.11.8</a:t>
             </a:r>
             <a:endParaRPr lang="en-US" sz="1050" dirty="0"/>
           </a:p>
@@ -14420,7 +14420,7 @@
                 <a:ea typeface="微软雅黑" pitchFamily="34" charset="-122"/>
                 <a:cs typeface="微软雅黑" pitchFamily="34" charset="-120"/>
               </a:rPr>
-              <a:t>帮扶管理信息系统 v1.11.7</a:t>
+              <a:t>帮扶管理信息系统 v1.11.8</a:t>
             </a:r>
             <a:endParaRPr lang="en-US" sz="1050" dirty="0"/>
           </a:p>
@@ -15030,7 +15030,7 @@
                 <a:ea typeface="微软雅黑" pitchFamily="34" charset="-122"/>
                 <a:cs typeface="微软雅黑" pitchFamily="34" charset="-120"/>
               </a:rPr>
-              <a:t>帮扶管理信息系统 v1.11.7</a:t>
+              <a:t>帮扶管理信息系统 v1.11.8</a:t>
             </a:r>
             <a:endParaRPr lang="en-US" sz="1050" dirty="0"/>
           </a:p>
@@ -15684,7 +15684,7 @@
                 <a:ea typeface="微软雅黑" pitchFamily="34" charset="-122"/>
                 <a:cs typeface="微软雅黑" pitchFamily="34" charset="-120"/>
               </a:rPr>
-              <a:t>帮扶管理信息系统 v1.11.7</a:t>
+              <a:t>帮扶管理信息系统 v1.11.8</a:t>
             </a:r>
             <a:endParaRPr lang="en-US" sz="1050" dirty="0"/>
           </a:p>
@@ -16363,7 +16363,7 @@
                 <a:ea typeface="微软雅黑" pitchFamily="34" charset="-122"/>
                 <a:cs typeface="微软雅黑" pitchFamily="34" charset="-120"/>
               </a:rPr>
-              <a:t>帮扶管理信息系统 v1.11.7</a:t>
+              <a:t>帮扶管理信息系统 v1.11.8</a:t>
             </a:r>
             <a:endParaRPr lang="en-US" sz="1050" dirty="0"/>
           </a:p>
@@ -17241,7 +17241,7 @@
                 <a:ea typeface="微软雅黑" pitchFamily="34" charset="-122"/>
                 <a:cs typeface="微软雅黑" pitchFamily="34" charset="-120"/>
               </a:rPr>
-              <a:t>帮扶管理信息系统 v1.11.7</a:t>
+              <a:t>帮扶管理信息系统 v1.11.8</a:t>
             </a:r>
             <a:endParaRPr lang="en-US" sz="1050" dirty="0"/>
           </a:p>
@@ -18413,7 +18413,7 @@
                 <a:ea typeface="微软雅黑" pitchFamily="34" charset="-122"/>
                 <a:cs typeface="微软雅黑" pitchFamily="34" charset="-120"/>
               </a:rPr>
-              <a:t>帮扶管理信息系统 v1.11.7</a:t>
+              <a:t>帮扶管理信息系统 v1.11.8</a:t>
             </a:r>
             <a:endParaRPr lang="en-US" sz="1050" dirty="0"/>
           </a:p>
@@ -19414,7 +19414,7 @@
                 <a:ea typeface="微软雅黑" pitchFamily="34" charset="-122"/>
                 <a:cs typeface="微软雅黑" pitchFamily="34" charset="-120"/>
               </a:rPr>
-              <a:t>帮扶管理信息系统 v1.11.7</a:t>
+              <a:t>帮扶管理信息系统 v1.11.8</a:t>
             </a:r>
             <a:endParaRPr lang="en-US" sz="1050" dirty="0"/>
           </a:p>
@@ -20233,7 +20233,7 @@
                 <a:ea typeface="微软雅黑" pitchFamily="34" charset="-122"/>
                 <a:cs typeface="微软雅黑" pitchFamily="34" charset="-120"/>
               </a:rPr>
-              <a:t>帮扶管理信息系统 v1.11.7</a:t>
+              <a:t>帮扶管理信息系统 v1.11.8</a:t>
             </a:r>
             <a:endParaRPr lang="en-US" sz="1050" dirty="0"/>
           </a:p>
@@ -21121,7 +21121,7 @@
                 <a:ea typeface="微软雅黑" pitchFamily="34" charset="-122"/>
                 <a:cs typeface="微软雅黑" pitchFamily="34" charset="-120"/>
               </a:rPr>
-              <a:t>帮扶管理信息系统 v1.11.7</a:t>
+              <a:t>帮扶管理信息系统 v1.11.8</a:t>
             </a:r>
             <a:endParaRPr lang="en-US" sz="1050" dirty="0"/>
           </a:p>
@@ -22239,7 +22239,7 @@
                 <a:ea typeface="微软雅黑" pitchFamily="34" charset="-122"/>
                 <a:cs typeface="微软雅黑" pitchFamily="34" charset="-120"/>
               </a:rPr>
-              <a:t>帮扶管理信息系统 v1.11.7</a:t>
+              <a:t>帮扶管理信息系统 v1.11.8</a:t>
             </a:r>
             <a:endParaRPr lang="en-US" sz="1050" dirty="0"/>
           </a:p>
@@ -23187,7 +23187,7 @@
                 <a:ea typeface="微软雅黑" pitchFamily="34" charset="-122"/>
                 <a:cs typeface="微软雅黑" pitchFamily="34" charset="-120"/>
               </a:rPr>
-              <a:t>帮扶管理信息系统 v1.11.7</a:t>
+              <a:t>帮扶管理信息系统 v1.11.8</a:t>
             </a:r>
             <a:endParaRPr lang="en-US" sz="1050" dirty="0"/>
           </a:p>
@@ -23242,7 +23242,7 @@
                 <a:ea typeface="微软雅黑" pitchFamily="34" charset="-122"/>
                 <a:cs typeface="微软雅黑" pitchFamily="34" charset="-120"/>
               </a:rPr>
-              <a:t>数据来源：v1.11.7 全量本地实测（2026-08-30）</a:t>
+              <a:t>数据来源：v1.11.8 全量本地实测（2026-08-30）</a:t>
             </a:r>
             <a:endParaRPr lang="en-US" sz="1100" dirty="0"/>
           </a:p>
@@ -23738,7 +23738,7 @@
                 <a:ea typeface="微软雅黑" pitchFamily="34" charset="-122"/>
                 <a:cs typeface="微软雅黑" pitchFamily="34" charset="-120"/>
               </a:rPr>
-              <a:t>帮扶管理信息系统 v1.11.7</a:t>
+              <a:t>帮扶管理信息系统 v1.11.8</a:t>
             </a:r>
             <a:endParaRPr lang="en-US" sz="1050" dirty="0"/>
           </a:p>
@@ -24405,7 +24405,7 @@
                 <a:ea typeface="微软雅黑" pitchFamily="34" charset="-122"/>
                 <a:cs typeface="微软雅黑" pitchFamily="34" charset="-120"/>
               </a:rPr>
-              <a:t>帮扶管理信息系统 v1.11.7</a:t>
+              <a:t>帮扶管理信息系统 v1.11.8</a:t>
             </a:r>
             <a:endParaRPr lang="en-US" sz="1050" dirty="0"/>
           </a:p>
@@ -25309,7 +25309,7 @@
                 <a:ea typeface="微软雅黑" pitchFamily="34" charset="-122"/>
                 <a:cs typeface="微软雅黑" pitchFamily="34" charset="-120"/>
               </a:rPr>
-              <a:t>帮扶管理信息系统 v1.11.7</a:t>
+              <a:t>帮扶管理信息系统 v1.11.8</a:t>
             </a:r>
             <a:endParaRPr lang="en-US" sz="1050" dirty="0"/>
           </a:p>
@@ -26373,7 +26373,7 @@
                 <a:ea typeface="微软雅黑" pitchFamily="34" charset="-122"/>
                 <a:cs typeface="微软雅黑" pitchFamily="34" charset="-120"/>
               </a:rPr>
-              <a:t>帮扶管理信息系统 v1.11.7</a:t>
+              <a:t>帮扶管理信息系统 v1.11.8</a:t>
             </a:r>
             <a:endParaRPr lang="en-US" sz="1050" dirty="0"/>
           </a:p>
@@ -26983,7 +26983,7 @@
                 <a:ea typeface="微软雅黑" pitchFamily="34" charset="-122"/>
                 <a:cs typeface="微软雅黑" pitchFamily="34" charset="-120"/>
               </a:rPr>
-              <a:t>帮扶管理信息系统 v1.11.7</a:t>
+              <a:t>帮扶管理信息系统 v1.11.8</a:t>
             </a:r>
             <a:endParaRPr lang="en-US" sz="1050" dirty="0"/>
           </a:p>
@@ -27637,7 +27637,7 @@
                 <a:ea typeface="微软雅黑" pitchFamily="34" charset="-122"/>
                 <a:cs typeface="微软雅黑" pitchFamily="34" charset="-120"/>
               </a:rPr>
-              <a:t>v1.11.7</a:t>
+              <a:t>v1.11.8</a:t>
             </a:r>
             <a:endParaRPr lang="en-US" sz="1500" dirty="0"/>
           </a:p>
@@ -27999,7 +27999,7 @@
                 <a:ea typeface="微软雅黑" pitchFamily="34" charset="-122"/>
                 <a:cs typeface="微软雅黑" pitchFamily="34" charset="-120"/>
               </a:rPr>
-              <a:t>帮扶管理信息系统 v1.11.7</a:t>
+              <a:t>帮扶管理信息系统 v1.11.8</a:t>
             </a:r>
             <a:endParaRPr lang="en-US" sz="1050" dirty="0"/>
           </a:p>
@@ -28877,7 +28877,7 @@
                 <a:ea typeface="微软雅黑" pitchFamily="34" charset="-122"/>
                 <a:cs typeface="微软雅黑" pitchFamily="34" charset="-120"/>
               </a:rPr>
-              <a:t>帮扶管理信息系统 v1.11.7</a:t>
+              <a:t>帮扶管理信息系统 v1.11.8</a:t>
             </a:r>
             <a:endParaRPr lang="en-US" sz="1050" dirty="0"/>
           </a:p>
@@ -29419,7 +29419,7 @@
                 <a:ea typeface="微软雅黑" pitchFamily="34" charset="-122"/>
                 <a:cs typeface="微软雅黑" pitchFamily="34" charset="-120"/>
               </a:rPr>
-              <a:t>帮扶管理信息系统 v1.11.7  ·  仓库：github.com/lzh745200/MRRS  ·  完整文档见 docs/ 目录</a:t>
+              <a:t>帮扶管理信息系统 v1.11.8  ·  仓库：github.com/lzh745200/MRRS  ·  完整文档见 docs/ 目录</a:t>
             </a:r>
             <a:endParaRPr lang="en-US" sz="1350" dirty="0"/>
           </a:p>
@@ -29670,7 +29670,7 @@
                 <a:ea typeface="微软雅黑" pitchFamily="34" charset="-122"/>
                 <a:cs typeface="微软雅黑" pitchFamily="34" charset="-120"/>
               </a:rPr>
-              <a:t>帮扶管理信息系统 v1.11.7</a:t>
+              <a:t>帮扶管理信息系统 v1.11.8</a:t>
             </a:r>
             <a:endParaRPr lang="en-US" sz="1050" dirty="0"/>
           </a:p>
@@ -30422,7 +30422,7 @@
                 <a:ea typeface="微软雅黑" pitchFamily="34" charset="-122"/>
                 <a:cs typeface="微软雅黑" pitchFamily="34" charset="-120"/>
               </a:rPr>
-              <a:t>帮扶管理信息系统 v1.11.7</a:t>
+              <a:t>帮扶管理信息系统 v1.11.8</a:t>
             </a:r>
             <a:endParaRPr lang="en-US" sz="1050" dirty="0"/>
           </a:p>
@@ -31112,7 +31112,7 @@
                 <a:ea typeface="微软雅黑" pitchFamily="34" charset="-122"/>
                 <a:cs typeface="微软雅黑" pitchFamily="34" charset="-120"/>
               </a:rPr>
-              <a:t>数据来源：仓库实测（2026-08-30，v1.11.7）—— flake8 0 错误 · bandit 0 中高危 · vue-tsc 0 错误 · eslint 0 警告</a:t>
+              <a:t>数据来源：仓库实测（2026-08-30，v1.11.8）—— flake8 0 错误 · bandit 0 中高危 · vue-tsc 0 错误 · eslint 0 警告</a:t>
             </a:r>
             <a:endParaRPr lang="en-US" sz="1200" dirty="0"/>
           </a:p>
@@ -31618,7 +31618,7 @@
                 <a:ea typeface="微软雅黑" pitchFamily="34" charset="-122"/>
                 <a:cs typeface="微软雅黑" pitchFamily="34" charset="-120"/>
               </a:rPr>
-              <a:t>帮扶管理信息系统 v1.11.7</a:t>
+              <a:t>帮扶管理信息系统 v1.11.8</a:t>
             </a:r>
             <a:endParaRPr lang="en-US" sz="1050" dirty="0"/>
           </a:p>
@@ -32698,7 +32698,7 @@
                 <a:ea typeface="微软雅黑" pitchFamily="34" charset="-122"/>
                 <a:cs typeface="微软雅黑" pitchFamily="34" charset="-120"/>
               </a:rPr>
-              <a:t>帮扶管理信息系统 v1.11.7</a:t>
+              <a:t>帮扶管理信息系统 v1.11.8</a:t>
             </a:r>
             <a:endParaRPr lang="en-US" sz="1050" dirty="0"/>
           </a:p>

--- a/docs/帮扶管理信息系统介绍.pptx
+++ b/docs/帮扶管理信息系统介绍.pptx
@@ -5089,7 +5089,7 @@
                 <a:ea typeface="微软雅黑" pitchFamily="34" charset="-122"/>
                 <a:cs typeface="微软雅黑" pitchFamily="34" charset="-120"/>
               </a:rPr>
-              <a:t>帮扶管理信息系统 v1.11.8</a:t>
+              <a:t>帮扶管理信息系统 v1.12.0</a:t>
             </a:r>
             <a:endParaRPr lang="en-US" sz="1050" dirty="0"/>
           </a:p>
@@ -5699,7 +5699,7 @@
                 <a:ea typeface="微软雅黑" pitchFamily="34" charset="-122"/>
                 <a:cs typeface="微软雅黑" pitchFamily="34" charset="-120"/>
               </a:rPr>
-              <a:t>帮扶管理信息系统 v1.11.8</a:t>
+              <a:t>帮扶管理信息系统 v1.12.0</a:t>
             </a:r>
             <a:endParaRPr lang="en-US" sz="1050" dirty="0"/>
           </a:p>
@@ -6599,7 +6599,7 @@
                 <a:ea typeface="微软雅黑" pitchFamily="34" charset="-122"/>
                 <a:cs typeface="微软雅黑" pitchFamily="34" charset="-120"/>
               </a:rPr>
-              <a:t>帮扶管理信息系统 v1.11.8</a:t>
+              <a:t>帮扶管理信息系统 v1.12.0</a:t>
             </a:r>
             <a:endParaRPr lang="en-US" sz="1050" dirty="0"/>
           </a:p>
@@ -7209,7 +7209,7 @@
                 <a:ea typeface="微软雅黑" pitchFamily="34" charset="-122"/>
                 <a:cs typeface="微软雅黑" pitchFamily="34" charset="-120"/>
               </a:rPr>
-              <a:t>帮扶管理信息系统 v1.11.8</a:t>
+              <a:t>帮扶管理信息系统 v1.12.0</a:t>
             </a:r>
             <a:endParaRPr lang="en-US" sz="1050" dirty="0"/>
           </a:p>
@@ -8598,7 +8598,7 @@
                 <a:ea typeface="微软雅黑" pitchFamily="34" charset="-122"/>
                 <a:cs typeface="微软雅黑" pitchFamily="34" charset="-120"/>
               </a:rPr>
-              <a:t>帮扶管理信息系统 v1.11.8</a:t>
+              <a:t>帮扶管理信息系统 v1.12.0</a:t>
             </a:r>
             <a:endParaRPr lang="en-US" sz="1050" dirty="0"/>
           </a:p>
@@ -9749,7 +9749,7 @@
                 <a:ea typeface="微软雅黑" pitchFamily="34" charset="-122"/>
                 <a:cs typeface="微软雅黑" pitchFamily="34" charset="-120"/>
               </a:rPr>
-              <a:t>帮扶管理信息系统 v1.11.8</a:t>
+              <a:t>帮扶管理信息系统 v1.12.0</a:t>
             </a:r>
             <a:endParaRPr lang="en-US" sz="1050" dirty="0"/>
           </a:p>
@@ -10359,7 +10359,7 @@
                 <a:ea typeface="微软雅黑" pitchFamily="34" charset="-122"/>
                 <a:cs typeface="微软雅黑" pitchFamily="34" charset="-120"/>
               </a:rPr>
-              <a:t>帮扶管理信息系统 v1.11.8</a:t>
+              <a:t>帮扶管理信息系统 v1.12.0</a:t>
             </a:r>
             <a:endParaRPr lang="en-US" sz="1050" dirty="0"/>
           </a:p>
@@ -11197,7 +11197,7 @@
                 <a:ea typeface="微软雅黑" pitchFamily="34" charset="-122"/>
                 <a:cs typeface="微软雅黑" pitchFamily="34" charset="-120"/>
               </a:rPr>
-              <a:t>帮扶管理信息系统 v1.11.8</a:t>
+              <a:t>帮扶管理信息系统 v1.12.0</a:t>
             </a:r>
             <a:endParaRPr lang="en-US" sz="1050" dirty="0"/>
           </a:p>
@@ -11914,7 +11914,7 @@
                 <a:ea typeface="微软雅黑" pitchFamily="34" charset="-122"/>
                 <a:cs typeface="微软雅黑" pitchFamily="34" charset="-120"/>
               </a:rPr>
-              <a:t>帮扶管理信息系统 v1.11.8</a:t>
+              <a:t>帮扶管理信息系统 v1.12.0</a:t>
             </a:r>
             <a:endParaRPr lang="en-US" sz="1050" dirty="0"/>
           </a:p>
@@ -14420,7 +14420,7 @@
                 <a:ea typeface="微软雅黑" pitchFamily="34" charset="-122"/>
                 <a:cs typeface="微软雅黑" pitchFamily="34" charset="-120"/>
               </a:rPr>
-              <a:t>帮扶管理信息系统 v1.11.8</a:t>
+              <a:t>帮扶管理信息系统 v1.12.0</a:t>
             </a:r>
             <a:endParaRPr lang="en-US" sz="1050" dirty="0"/>
           </a:p>
@@ -15030,7 +15030,7 @@
                 <a:ea typeface="微软雅黑" pitchFamily="34" charset="-122"/>
                 <a:cs typeface="微软雅黑" pitchFamily="34" charset="-120"/>
               </a:rPr>
-              <a:t>帮扶管理信息系统 v1.11.8</a:t>
+              <a:t>帮扶管理信息系统 v1.12.0</a:t>
             </a:r>
             <a:endParaRPr lang="en-US" sz="1050" dirty="0"/>
           </a:p>
@@ -15684,7 +15684,7 @@
                 <a:ea typeface="微软雅黑" pitchFamily="34" charset="-122"/>
                 <a:cs typeface="微软雅黑" pitchFamily="34" charset="-120"/>
               </a:rPr>
-              <a:t>帮扶管理信息系统 v1.11.8</a:t>
+              <a:t>帮扶管理信息系统 v1.12.0</a:t>
             </a:r>
             <a:endParaRPr lang="en-US" sz="1050" dirty="0"/>
           </a:p>
@@ -16363,7 +16363,7 @@
                 <a:ea typeface="微软雅黑" pitchFamily="34" charset="-122"/>
                 <a:cs typeface="微软雅黑" pitchFamily="34" charset="-120"/>
               </a:rPr>
-              <a:t>帮扶管理信息系统 v1.11.8</a:t>
+              <a:t>帮扶管理信息系统 v1.12.0</a:t>
             </a:r>
             <a:endParaRPr lang="en-US" sz="1050" dirty="0"/>
           </a:p>
@@ -17241,7 +17241,7 @@
                 <a:ea typeface="微软雅黑" pitchFamily="34" charset="-122"/>
                 <a:cs typeface="微软雅黑" pitchFamily="34" charset="-120"/>
               </a:rPr>
-              <a:t>帮扶管理信息系统 v1.11.8</a:t>
+              <a:t>帮扶管理信息系统 v1.12.0</a:t>
             </a:r>
             <a:endParaRPr lang="en-US" sz="1050" dirty="0"/>
           </a:p>
@@ -18413,7 +18413,7 @@
                 <a:ea typeface="微软雅黑" pitchFamily="34" charset="-122"/>
                 <a:cs typeface="微软雅黑" pitchFamily="34" charset="-120"/>
               </a:rPr>
-              <a:t>帮扶管理信息系统 v1.11.8</a:t>
+              <a:t>帮扶管理信息系统 v1.12.0</a:t>
             </a:r>
             <a:endParaRPr lang="en-US" sz="1050" dirty="0"/>
           </a:p>
@@ -19414,7 +19414,7 @@
                 <a:ea typeface="微软雅黑" pitchFamily="34" charset="-122"/>
                 <a:cs typeface="微软雅黑" pitchFamily="34" charset="-120"/>
               </a:rPr>
-              <a:t>帮扶管理信息系统 v1.11.8</a:t>
+              <a:t>帮扶管理信息系统 v1.12.0</a:t>
             </a:r>
             <a:endParaRPr lang="en-US" sz="1050" dirty="0"/>
           </a:p>
@@ -20233,7 +20233,7 @@
                 <a:ea typeface="微软雅黑" pitchFamily="34" charset="-122"/>
                 <a:cs typeface="微软雅黑" pitchFamily="34" charset="-120"/>
               </a:rPr>
-              <a:t>帮扶管理信息系统 v1.11.8</a:t>
+              <a:t>帮扶管理信息系统 v1.12.0</a:t>
             </a:r>
             <a:endParaRPr lang="en-US" sz="1050" dirty="0"/>
           </a:p>
@@ -21121,7 +21121,7 @@
                 <a:ea typeface="微软雅黑" pitchFamily="34" charset="-122"/>
                 <a:cs typeface="微软雅黑" pitchFamily="34" charset="-120"/>
               </a:rPr>
-              <a:t>帮扶管理信息系统 v1.11.8</a:t>
+              <a:t>帮扶管理信息系统 v1.12.0</a:t>
             </a:r>
             <a:endParaRPr lang="en-US" sz="1050" dirty="0"/>
           </a:p>
@@ -22239,7 +22239,7 @@
                 <a:ea typeface="微软雅黑" pitchFamily="34" charset="-122"/>
                 <a:cs typeface="微软雅黑" pitchFamily="34" charset="-120"/>
               </a:rPr>
-              <a:t>帮扶管理信息系统 v1.11.8</a:t>
+              <a:t>帮扶管理信息系统 v1.12.0</a:t>
             </a:r>
             <a:endParaRPr lang="en-US" sz="1050" dirty="0"/>
           </a:p>
@@ -23187,7 +23187,7 @@
                 <a:ea typeface="微软雅黑" pitchFamily="34" charset="-122"/>
                 <a:cs typeface="微软雅黑" pitchFamily="34" charset="-120"/>
               </a:rPr>
-              <a:t>帮扶管理信息系统 v1.11.8</a:t>
+              <a:t>帮扶管理信息系统 v1.12.0</a:t>
             </a:r>
             <a:endParaRPr lang="en-US" sz="1050" dirty="0"/>
           </a:p>
@@ -23242,7 +23242,7 @@
                 <a:ea typeface="微软雅黑" pitchFamily="34" charset="-122"/>
                 <a:cs typeface="微软雅黑" pitchFamily="34" charset="-120"/>
               </a:rPr>
-              <a:t>数据来源：v1.11.8 全量本地实测（2026-08-30）</a:t>
+              <a:t>数据来源：v1.12.0 全量本地实测（2026-08-30）</a:t>
             </a:r>
             <a:endParaRPr lang="en-US" sz="1100" dirty="0"/>
           </a:p>
@@ -23738,7 +23738,7 @@
                 <a:ea typeface="微软雅黑" pitchFamily="34" charset="-122"/>
                 <a:cs typeface="微软雅黑" pitchFamily="34" charset="-120"/>
               </a:rPr>
-              <a:t>帮扶管理信息系统 v1.11.8</a:t>
+              <a:t>帮扶管理信息系统 v1.12.0</a:t>
             </a:r>
             <a:endParaRPr lang="en-US" sz="1050" dirty="0"/>
           </a:p>
@@ -24405,7 +24405,7 @@
                 <a:ea typeface="微软雅黑" pitchFamily="34" charset="-122"/>
                 <a:cs typeface="微软雅黑" pitchFamily="34" charset="-120"/>
               </a:rPr>
-              <a:t>帮扶管理信息系统 v1.11.8</a:t>
+              <a:t>帮扶管理信息系统 v1.12.0</a:t>
             </a:r>
             <a:endParaRPr lang="en-US" sz="1050" dirty="0"/>
           </a:p>
@@ -25309,7 +25309,7 @@
                 <a:ea typeface="微软雅黑" pitchFamily="34" charset="-122"/>
                 <a:cs typeface="微软雅黑" pitchFamily="34" charset="-120"/>
               </a:rPr>
-              <a:t>帮扶管理信息系统 v1.11.8</a:t>
+              <a:t>帮扶管理信息系统 v1.12.0</a:t>
             </a:r>
             <a:endParaRPr lang="en-US" sz="1050" dirty="0"/>
           </a:p>
@@ -26373,7 +26373,7 @@
                 <a:ea typeface="微软雅黑" pitchFamily="34" charset="-122"/>
                 <a:cs typeface="微软雅黑" pitchFamily="34" charset="-120"/>
               </a:rPr>
-              <a:t>帮扶管理信息系统 v1.11.8</a:t>
+              <a:t>帮扶管理信息系统 v1.12.0</a:t>
             </a:r>
             <a:endParaRPr lang="en-US" sz="1050" dirty="0"/>
           </a:p>
@@ -26983,7 +26983,7 @@
                 <a:ea typeface="微软雅黑" pitchFamily="34" charset="-122"/>
                 <a:cs typeface="微软雅黑" pitchFamily="34" charset="-120"/>
               </a:rPr>
-              <a:t>帮扶管理信息系统 v1.11.8</a:t>
+              <a:t>帮扶管理信息系统 v1.12.0</a:t>
             </a:r>
             <a:endParaRPr lang="en-US" sz="1050" dirty="0"/>
           </a:p>
@@ -27637,7 +27637,7 @@
                 <a:ea typeface="微软雅黑" pitchFamily="34" charset="-122"/>
                 <a:cs typeface="微软雅黑" pitchFamily="34" charset="-120"/>
               </a:rPr>
-              <a:t>v1.11.8</a:t>
+              <a:t>v1.12.0</a:t>
             </a:r>
             <a:endParaRPr lang="en-US" sz="1500" dirty="0"/>
           </a:p>
@@ -27999,7 +27999,7 @@
                 <a:ea typeface="微软雅黑" pitchFamily="34" charset="-122"/>
                 <a:cs typeface="微软雅黑" pitchFamily="34" charset="-120"/>
               </a:rPr>
-              <a:t>帮扶管理信息系统 v1.11.8</a:t>
+              <a:t>帮扶管理信息系统 v1.12.0</a:t>
             </a:r>
             <a:endParaRPr lang="en-US" sz="1050" dirty="0"/>
           </a:p>
@@ -28877,7 +28877,7 @@
                 <a:ea typeface="微软雅黑" pitchFamily="34" charset="-122"/>
                 <a:cs typeface="微软雅黑" pitchFamily="34" charset="-120"/>
               </a:rPr>
-              <a:t>帮扶管理信息系统 v1.11.8</a:t>
+              <a:t>帮扶管理信息系统 v1.12.0</a:t>
             </a:r>
             <a:endParaRPr lang="en-US" sz="1050" dirty="0"/>
           </a:p>
@@ -29419,7 +29419,7 @@
                 <a:ea typeface="微软雅黑" pitchFamily="34" charset="-122"/>
                 <a:cs typeface="微软雅黑" pitchFamily="34" charset="-120"/>
               </a:rPr>
-              <a:t>帮扶管理信息系统 v1.11.8  ·  仓库：github.com/lzh745200/MRRS  ·  完整文档见 docs/ 目录</a:t>
+              <a:t>帮扶管理信息系统 v1.12.0  ·  仓库：github.com/lzh745200/MRRS  ·  完整文档见 docs/ 目录</a:t>
             </a:r>
             <a:endParaRPr lang="en-US" sz="1350" dirty="0"/>
           </a:p>
@@ -29670,7 +29670,7 @@
                 <a:ea typeface="微软雅黑" pitchFamily="34" charset="-122"/>
                 <a:cs typeface="微软雅黑" pitchFamily="34" charset="-120"/>
               </a:rPr>
-              <a:t>帮扶管理信息系统 v1.11.8</a:t>
+              <a:t>帮扶管理信息系统 v1.12.0</a:t>
             </a:r>
             <a:endParaRPr lang="en-US" sz="1050" dirty="0"/>
           </a:p>
@@ -30422,7 +30422,7 @@
                 <a:ea typeface="微软雅黑" pitchFamily="34" charset="-122"/>
                 <a:cs typeface="微软雅黑" pitchFamily="34" charset="-120"/>
               </a:rPr>
-              <a:t>帮扶管理信息系统 v1.11.8</a:t>
+              <a:t>帮扶管理信息系统 v1.12.0</a:t>
             </a:r>
             <a:endParaRPr lang="en-US" sz="1050" dirty="0"/>
           </a:p>
@@ -31112,7 +31112,7 @@
                 <a:ea typeface="微软雅黑" pitchFamily="34" charset="-122"/>
                 <a:cs typeface="微软雅黑" pitchFamily="34" charset="-120"/>
               </a:rPr>
-              <a:t>数据来源：仓库实测（2026-08-30，v1.11.8）—— flake8 0 错误 · bandit 0 中高危 · vue-tsc 0 错误 · eslint 0 警告</a:t>
+              <a:t>数据来源：仓库实测（2026-08-30，v1.12.0）—— flake8 0 错误 · bandit 0 中高危 · vue-tsc 0 错误 · eslint 0 警告</a:t>
             </a:r>
             <a:endParaRPr lang="en-US" sz="1200" dirty="0"/>
           </a:p>
@@ -31618,7 +31618,7 @@
                 <a:ea typeface="微软雅黑" pitchFamily="34" charset="-122"/>
                 <a:cs typeface="微软雅黑" pitchFamily="34" charset="-120"/>
               </a:rPr>
-              <a:t>帮扶管理信息系统 v1.11.8</a:t>
+              <a:t>帮扶管理信息系统 v1.12.0</a:t>
             </a:r>
             <a:endParaRPr lang="en-US" sz="1050" dirty="0"/>
           </a:p>
@@ -32698,7 +32698,7 @@
                 <a:ea typeface="微软雅黑" pitchFamily="34" charset="-122"/>
                 <a:cs typeface="微软雅黑" pitchFamily="34" charset="-120"/>
               </a:rPr>
-              <a:t>帮扶管理信息系统 v1.11.8</a:t>
+              <a:t>帮扶管理信息系统 v1.12.0</a:t>
             </a:r>
             <a:endParaRPr lang="en-US" sz="1050" dirty="0"/>
           </a:p>
